--- a/gyeongsan/GSJOB_2교시_채용공고분석.pptx
+++ b/gyeongsan/GSJOB_2교시_채용공고분석.pptx
@@ -3123,7 +3123,7 @@
             <a:avLst/>
           </a:prstGeom>
           <a:solidFill>
-            <a:srgbClr val="F1F4FC"/>
+            <a:srgbClr val="F1F7F5"/>
           </a:solidFill>
           <a:ln>
             <a:noFill/>
@@ -3183,7 +3183,7 @@
             <a:avLst/>
           </a:prstGeom>
           <a:solidFill>
-            <a:srgbClr val="F6F6F9"/>
+            <a:srgbClr val="F6F7F9"/>
           </a:solidFill>
           <a:ln>
             <a:noFill/>
@@ -3213,7 +3213,7 @@
             <a:avLst/>
           </a:prstGeom>
           <a:solidFill>
-            <a:srgbClr val="E8E9F0"/>
+            <a:srgbClr val="E8EBF0"/>
           </a:solidFill>
           <a:ln>
             <a:noFill/>
@@ -3243,7 +3243,7 @@
             <a:avLst/>
           </a:prstGeom>
           <a:solidFill>
-            <a:srgbClr val="EEF2FB"/>
+            <a:srgbClr val="EEF5F2"/>
           </a:solidFill>
           <a:ln>
             <a:noFill/>
@@ -3303,7 +3303,7 @@
             <a:avLst/>
           </a:prstGeom>
           <a:solidFill>
-            <a:srgbClr val="EDEDF3"/>
+            <a:srgbClr val="EDEFF3"/>
           </a:solidFill>
           <a:ln>
             <a:noFill/>
@@ -3333,7 +3333,7 @@
             <a:avLst/>
           </a:prstGeom>
           <a:solidFill>
-            <a:srgbClr val="E2E9F9"/>
+            <a:srgbClr val="E1EEE9"/>
           </a:solidFill>
           <a:ln>
             <a:noFill/>
@@ -3363,7 +3363,7 @@
             <a:avLst/>
           </a:prstGeom>
           <a:solidFill>
-            <a:srgbClr val="E8E9F0"/>
+            <a:srgbClr val="E8EBF0"/>
           </a:solidFill>
           <a:ln>
             <a:noFill/>
@@ -3393,7 +3393,7 @@
             <a:avLst/>
           </a:prstGeom>
           <a:solidFill>
-            <a:srgbClr val="1E2A6E"/>
+            <a:srgbClr val="1E3E69"/>
           </a:solidFill>
           <a:ln>
             <a:noFill/>
@@ -3438,7 +3438,7 @@
             <a:r>
               <a:rPr sz="2400" b="1" spc="120">
                 <a:solidFill>
-                  <a:srgbClr val="2457D6"/>
+                  <a:srgbClr val="1E7F5B"/>
                 </a:solidFill>
                 <a:latin typeface="Pretendard"/>
                 <a:ea typeface="Pretendard"/>
@@ -3479,7 +3479,7 @@
             <a:r>
               <a:rPr sz="9300" b="1" spc="-347">
                 <a:solidFill>
-                  <a:srgbClr val="1E2A6E"/>
+                  <a:srgbClr val="1E3E69"/>
                 </a:solidFill>
                 <a:latin typeface="Pretendard"/>
                 <a:ea typeface="Pretendard"/>
@@ -3497,7 +3497,7 @@
             <a:r>
               <a:rPr sz="9300" b="1" spc="-347">
                 <a:solidFill>
-                  <a:srgbClr val="1E2A6E"/>
+                  <a:srgbClr val="1E3E69"/>
                 </a:solidFill>
                 <a:latin typeface="Pretendard"/>
                 <a:ea typeface="Pretendard"/>
@@ -3641,7 +3641,7 @@
             <a:avLst/>
           </a:prstGeom>
           <a:solidFill>
-            <a:srgbClr val="F4F6FC"/>
+            <a:srgbClr val="F3F8F6"/>
           </a:solidFill>
           <a:ln>
             <a:noFill/>
@@ -3701,7 +3701,7 @@
             <a:avLst/>
           </a:prstGeom>
           <a:solidFill>
-            <a:srgbClr val="F8F8FA"/>
+            <a:srgbClr val="F8F9FA"/>
           </a:solidFill>
           <a:ln>
             <a:noFill/>
@@ -3746,7 +3746,7 @@
             <a:r>
               <a:rPr sz="1950" b="1" spc="160">
                 <a:solidFill>
-                  <a:srgbClr val="2457D6"/>
+                  <a:srgbClr val="1E7F5B"/>
                 </a:solidFill>
                 <a:latin typeface="Pretendard"/>
                 <a:ea typeface="Pretendard"/>
@@ -3787,7 +3787,7 @@
             <a:r>
               <a:rPr sz="5100" b="1">
                 <a:solidFill>
-                  <a:srgbClr val="1E2A6E"/>
+                  <a:srgbClr val="1E3E69"/>
                 </a:solidFill>
                 <a:latin typeface="Pretendard"/>
                 <a:ea typeface="Pretendard"/>
@@ -3813,7 +3813,7 @@
             <a:avLst/>
           </a:prstGeom>
           <a:solidFill>
-            <a:srgbClr val="1E2A6E"/>
+            <a:srgbClr val="1E3E69"/>
           </a:solidFill>
           <a:ln>
             <a:noFill/>
@@ -3843,7 +3843,7 @@
             <a:avLst/>
           </a:prstGeom>
           <a:solidFill>
-            <a:srgbClr val="1E2A6E"/>
+            <a:srgbClr val="1E3E69"/>
           </a:solidFill>
           <a:ln>
             <a:noFill/>
@@ -3914,7 +3914,7 @@
             <a:avLst/>
           </a:prstGeom>
           <a:solidFill>
-            <a:srgbClr val="2457D6"/>
+            <a:srgbClr val="1E7F5B"/>
           </a:solidFill>
           <a:ln>
             <a:noFill/>
@@ -3985,7 +3985,7 @@
             <a:avLst/>
           </a:prstGeom>
           <a:solidFill>
-            <a:srgbClr val="2457D6"/>
+            <a:srgbClr val="1E7F5B"/>
           </a:solidFill>
           <a:ln>
             <a:noFill/>
@@ -4058,11 +4058,11 @@
             </a:avLst>
           </a:prstGeom>
           <a:solidFill>
-            <a:srgbClr val="EAF0FF"/>
+            <a:srgbClr val="E6F4EE"/>
           </a:solidFill>
           <a:ln w="9525">
             <a:solidFill>
-              <a:srgbClr val="C9D7FF"/>
+              <a:srgbClr val="C3E6D8"/>
             </a:solidFill>
           </a:ln>
           <a:effectLst/>
@@ -4105,7 +4105,7 @@
             <a:r>
               <a:rPr sz="1875" b="1">
                 <a:solidFill>
-                  <a:srgbClr val="1E2A6E"/>
+                  <a:srgbClr val="1E3E69"/>
                 </a:solidFill>
                 <a:latin typeface="Pretendard"/>
                 <a:ea typeface="Pretendard"/>
@@ -4133,11 +4133,11 @@
             </a:avLst>
           </a:prstGeom>
           <a:solidFill>
-            <a:srgbClr val="F6F8FD"/>
+            <a:srgbClr val="F4F7FA"/>
           </a:solidFill>
           <a:ln w="9525">
             <a:solidFill>
-              <a:srgbClr val="DEE3F0"/>
+              <a:srgbClr val="D8E1EE"/>
             </a:solidFill>
           </a:ln>
           <a:effectLst/>
@@ -4208,11 +4208,11 @@
             </a:avLst>
           </a:prstGeom>
           <a:solidFill>
-            <a:srgbClr val="F6F8FD"/>
+            <a:srgbClr val="F4F7FA"/>
           </a:solidFill>
           <a:ln w="9525">
             <a:solidFill>
-              <a:srgbClr val="DEE3F0"/>
+              <a:srgbClr val="D8E1EE"/>
             </a:solidFill>
           </a:ln>
           <a:effectLst/>
@@ -4283,11 +4283,11 @@
             </a:avLst>
           </a:prstGeom>
           <a:solidFill>
-            <a:srgbClr val="EAF0FF"/>
+            <a:srgbClr val="E6F4EE"/>
           </a:solidFill>
           <a:ln w="9525">
             <a:solidFill>
-              <a:srgbClr val="C9D7FF"/>
+              <a:srgbClr val="C3E6D8"/>
             </a:solidFill>
           </a:ln>
           <a:effectLst/>
@@ -4330,7 +4330,7 @@
             <a:r>
               <a:rPr sz="1875" b="1">
                 <a:solidFill>
-                  <a:srgbClr val="1E2A6E"/>
+                  <a:srgbClr val="1E3E69"/>
                 </a:solidFill>
                 <a:latin typeface="Pretendard"/>
                 <a:ea typeface="Pretendard"/>
@@ -4358,11 +4358,11 @@
             </a:avLst>
           </a:prstGeom>
           <a:solidFill>
-            <a:srgbClr val="F6F8FD"/>
+            <a:srgbClr val="F4F7FA"/>
           </a:solidFill>
           <a:ln w="9525">
             <a:solidFill>
-              <a:srgbClr val="DEE3F0"/>
+              <a:srgbClr val="D8E1EE"/>
             </a:solidFill>
           </a:ln>
           <a:effectLst/>
@@ -4433,11 +4433,11 @@
             </a:avLst>
           </a:prstGeom>
           <a:solidFill>
-            <a:srgbClr val="F6F8FD"/>
+            <a:srgbClr val="F4F7FA"/>
           </a:solidFill>
           <a:ln w="9525">
             <a:solidFill>
-              <a:srgbClr val="DEE3F0"/>
+              <a:srgbClr val="D8E1EE"/>
             </a:solidFill>
           </a:ln>
           <a:effectLst/>
@@ -4508,11 +4508,11 @@
             </a:avLst>
           </a:prstGeom>
           <a:solidFill>
-            <a:srgbClr val="EAF0FF"/>
+            <a:srgbClr val="E6F4EE"/>
           </a:solidFill>
           <a:ln w="9525">
             <a:solidFill>
-              <a:srgbClr val="C9D7FF"/>
+              <a:srgbClr val="C3E6D8"/>
             </a:solidFill>
           </a:ln>
           <a:effectLst/>
@@ -4555,7 +4555,7 @@
             <a:r>
               <a:rPr sz="1875" b="1">
                 <a:solidFill>
-                  <a:srgbClr val="1E2A6E"/>
+                  <a:srgbClr val="1E3E69"/>
                 </a:solidFill>
                 <a:latin typeface="Pretendard"/>
                 <a:ea typeface="Pretendard"/>
@@ -4583,11 +4583,11 @@
             </a:avLst>
           </a:prstGeom>
           <a:solidFill>
-            <a:srgbClr val="F6F8FD"/>
+            <a:srgbClr val="F4F7FA"/>
           </a:solidFill>
           <a:ln w="9525">
             <a:solidFill>
-              <a:srgbClr val="DEE3F0"/>
+              <a:srgbClr val="D8E1EE"/>
             </a:solidFill>
           </a:ln>
           <a:effectLst/>
@@ -4658,11 +4658,11 @@
             </a:avLst>
           </a:prstGeom>
           <a:solidFill>
-            <a:srgbClr val="F6F8FD"/>
+            <a:srgbClr val="F4F7FA"/>
           </a:solidFill>
           <a:ln w="9525">
             <a:solidFill>
-              <a:srgbClr val="DEE3F0"/>
+              <a:srgbClr val="D8E1EE"/>
             </a:solidFill>
           </a:ln>
           <a:effectLst/>
@@ -4733,11 +4733,11 @@
             </a:avLst>
           </a:prstGeom>
           <a:solidFill>
-            <a:srgbClr val="EAF0FF"/>
+            <a:srgbClr val="E6F4EE"/>
           </a:solidFill>
           <a:ln w="9525">
             <a:solidFill>
-              <a:srgbClr val="C9D7FF"/>
+              <a:srgbClr val="C3E6D8"/>
             </a:solidFill>
           </a:ln>
           <a:effectLst/>
@@ -4780,7 +4780,7 @@
             <a:r>
               <a:rPr sz="1875" b="1">
                 <a:solidFill>
-                  <a:srgbClr val="1E2A6E"/>
+                  <a:srgbClr val="1E3E69"/>
                 </a:solidFill>
                 <a:latin typeface="Pretendard"/>
                 <a:ea typeface="Pretendard"/>
@@ -4808,11 +4808,11 @@
             </a:avLst>
           </a:prstGeom>
           <a:solidFill>
-            <a:srgbClr val="F6F8FD"/>
+            <a:srgbClr val="F4F7FA"/>
           </a:solidFill>
           <a:ln w="9525">
             <a:solidFill>
-              <a:srgbClr val="DEE3F0"/>
+              <a:srgbClr val="D8E1EE"/>
             </a:solidFill>
           </a:ln>
           <a:effectLst/>
@@ -4883,11 +4883,11 @@
             </a:avLst>
           </a:prstGeom>
           <a:solidFill>
-            <a:srgbClr val="F6F8FD"/>
+            <a:srgbClr val="F4F7FA"/>
           </a:solidFill>
           <a:ln w="9525">
             <a:solidFill>
-              <a:srgbClr val="DEE3F0"/>
+              <a:srgbClr val="D8E1EE"/>
             </a:solidFill>
           </a:ln>
           <a:effectLst/>
@@ -4997,7 +4997,7 @@
             <a:avLst/>
           </a:prstGeom>
           <a:solidFill>
-            <a:srgbClr val="DEE3F0"/>
+            <a:srgbClr val="D8E1EE"/>
           </a:solidFill>
           <a:ln>
             <a:noFill/>
@@ -5127,7 +5127,7 @@
             <a:avLst/>
           </a:prstGeom>
           <a:solidFill>
-            <a:srgbClr val="F4F6FC"/>
+            <a:srgbClr val="F3F8F6"/>
           </a:solidFill>
           <a:ln>
             <a:noFill/>
@@ -5187,7 +5187,7 @@
             <a:avLst/>
           </a:prstGeom>
           <a:solidFill>
-            <a:srgbClr val="F8F8FA"/>
+            <a:srgbClr val="F8F9FA"/>
           </a:solidFill>
           <a:ln>
             <a:noFill/>
@@ -5219,7 +5219,7 @@
             </a:avLst>
           </a:prstGeom>
           <a:solidFill>
-            <a:srgbClr val="2457D6"/>
+            <a:srgbClr val="1E7F5B"/>
           </a:solidFill>
           <a:ln>
             <a:noFill/>
@@ -5335,7 +5335,7 @@
             <a:r>
               <a:rPr sz="1950" b="1" spc="160">
                 <a:solidFill>
-                  <a:srgbClr val="2457D6"/>
+                  <a:srgbClr val="1E7F5B"/>
                 </a:solidFill>
                 <a:latin typeface="Pretendard"/>
                 <a:ea typeface="Pretendard"/>
@@ -5376,7 +5376,7 @@
             <a:r>
               <a:rPr sz="5100" b="1">
                 <a:solidFill>
-                  <a:srgbClr val="1E2A6E"/>
+                  <a:srgbClr val="1E3E69"/>
                 </a:solidFill>
                 <a:latin typeface="Pretendard"/>
                 <a:ea typeface="Pretendard"/>
@@ -5402,7 +5402,7 @@
             <a:avLst/>
           </a:prstGeom>
           <a:solidFill>
-            <a:srgbClr val="1E2A6E"/>
+            <a:srgbClr val="1E3E69"/>
           </a:solidFill>
           <a:ln>
             <a:noFill/>
@@ -5447,7 +5447,7 @@
             <a:r>
               <a:rPr sz="2250" b="1">
                 <a:solidFill>
-                  <a:srgbClr val="2457D6"/>
+                  <a:srgbClr val="1E7F5B"/>
                 </a:solidFill>
                 <a:latin typeface="Pretendard"/>
                 <a:ea typeface="Pretendard"/>
@@ -5475,11 +5475,11 @@
             </a:avLst>
           </a:prstGeom>
           <a:solidFill>
-            <a:srgbClr val="F6F8FD"/>
+            <a:srgbClr val="F4F7FA"/>
           </a:solidFill>
           <a:ln w="9525">
             <a:solidFill>
-              <a:srgbClr val="DEE3F0"/>
+              <a:srgbClr val="D8E1EE"/>
             </a:solidFill>
           </a:ln>
           <a:effectLst/>
@@ -5507,7 +5507,7 @@
             <a:avLst/>
           </a:prstGeom>
           <a:solidFill>
-            <a:srgbClr val="1E2A6E"/>
+            <a:srgbClr val="1E3E69"/>
           </a:solidFill>
           <a:ln>
             <a:noFill/>
@@ -5593,7 +5593,7 @@
             <a:r>
               <a:rPr sz="2700" b="1">
                 <a:solidFill>
-                  <a:srgbClr val="1E2A6E"/>
+                  <a:srgbClr val="1E3E69"/>
                 </a:solidFill>
                 <a:latin typeface="Pretendard"/>
                 <a:ea typeface="Pretendard"/>
@@ -5619,7 +5619,7 @@
             <a:avLst/>
           </a:prstGeom>
           <a:solidFill>
-            <a:srgbClr val="2457D6"/>
+            <a:srgbClr val="1E7F5B"/>
           </a:solidFill>
           <a:ln>
             <a:noFill/>
@@ -5664,7 +5664,7 @@
             <a:r>
               <a:rPr sz="1875" b="1" spc="150">
                 <a:solidFill>
-                  <a:srgbClr val="2457D6"/>
+                  <a:srgbClr val="1E7F5B"/>
                 </a:solidFill>
                 <a:latin typeface="Pretendard"/>
                 <a:ea typeface="Pretendard"/>
@@ -5705,7 +5705,7 @@
             <a:r>
               <a:rPr sz="2475" b="1">
                 <a:solidFill>
-                  <a:srgbClr val="1E2A6E"/>
+                  <a:srgbClr val="1E3E69"/>
                 </a:solidFill>
                 <a:latin typeface="Pretendard"/>
                 <a:ea typeface="Pretendard"/>
@@ -5731,7 +5731,7 @@
             <a:avLst/>
           </a:prstGeom>
           <a:solidFill>
-            <a:srgbClr val="DEE3F0"/>
+            <a:srgbClr val="D8E1EE"/>
           </a:solidFill>
           <a:ln>
             <a:noFill/>
@@ -5861,7 +5861,7 @@
             <a:avLst/>
           </a:prstGeom>
           <a:solidFill>
-            <a:srgbClr val="F4F6FC"/>
+            <a:srgbClr val="F3F8F6"/>
           </a:solidFill>
           <a:ln>
             <a:noFill/>
@@ -5921,7 +5921,7 @@
             <a:avLst/>
           </a:prstGeom>
           <a:solidFill>
-            <a:srgbClr val="F8F8FA"/>
+            <a:srgbClr val="F8F9FA"/>
           </a:solidFill>
           <a:ln>
             <a:noFill/>
@@ -5966,7 +5966,7 @@
             <a:r>
               <a:rPr sz="1950" b="1" spc="160">
                 <a:solidFill>
-                  <a:srgbClr val="2457D6"/>
+                  <a:srgbClr val="1E7F5B"/>
                 </a:solidFill>
                 <a:latin typeface="Pretendard"/>
                 <a:ea typeface="Pretendard"/>
@@ -6007,7 +6007,7 @@
             <a:r>
               <a:rPr sz="5100" b="1">
                 <a:solidFill>
-                  <a:srgbClr val="1E2A6E"/>
+                  <a:srgbClr val="1E3E69"/>
                 </a:solidFill>
                 <a:latin typeface="Pretendard"/>
                 <a:ea typeface="Pretendard"/>
@@ -6033,7 +6033,7 @@
             <a:avLst/>
           </a:prstGeom>
           <a:solidFill>
-            <a:srgbClr val="1E2A6E"/>
+            <a:srgbClr val="1E3E69"/>
           </a:solidFill>
           <a:ln>
             <a:noFill/>
@@ -6065,11 +6065,11 @@
             </a:avLst>
           </a:prstGeom>
           <a:solidFill>
-            <a:srgbClr val="1E2A6E"/>
+            <a:srgbClr val="1E3E69"/>
           </a:solidFill>
           <a:ln w="9525">
             <a:solidFill>
-              <a:srgbClr val="1E2A6E"/>
+              <a:srgbClr val="1E3E69"/>
             </a:solidFill>
           </a:ln>
           <a:effectLst/>
@@ -6097,7 +6097,7 @@
             <a:avLst/>
           </a:prstGeom>
           <a:solidFill>
-            <a:srgbClr val="2457D6"/>
+            <a:srgbClr val="1E7F5B"/>
           </a:solidFill>
           <a:ln>
             <a:noFill/>
@@ -6250,11 +6250,11 @@
             </a:avLst>
           </a:prstGeom>
           <a:solidFill>
-            <a:srgbClr val="F6F8FD"/>
+            <a:srgbClr val="F4F7FA"/>
           </a:solidFill>
           <a:ln w="9525">
             <a:solidFill>
-              <a:srgbClr val="DEE3F0"/>
+              <a:srgbClr val="D8E1EE"/>
             </a:solidFill>
           </a:ln>
           <a:effectLst/>
@@ -6282,7 +6282,7 @@
             <a:avLst/>
           </a:prstGeom>
           <a:solidFill>
-            <a:srgbClr val="2457D6"/>
+            <a:srgbClr val="1E7F5B"/>
           </a:solidFill>
           <a:ln>
             <a:noFill/>
@@ -6368,7 +6368,7 @@
             <a:r>
               <a:rPr sz="3150" b="1">
                 <a:solidFill>
-                  <a:srgbClr val="1E2A6E"/>
+                  <a:srgbClr val="1E3E69"/>
                 </a:solidFill>
                 <a:latin typeface="Pretendard"/>
                 <a:ea typeface="Pretendard"/>
@@ -6435,11 +6435,11 @@
             </a:avLst>
           </a:prstGeom>
           <a:solidFill>
-            <a:srgbClr val="F6F8FD"/>
+            <a:srgbClr val="F4F7FA"/>
           </a:solidFill>
           <a:ln w="9525">
             <a:solidFill>
-              <a:srgbClr val="DEE3F0"/>
+              <a:srgbClr val="D8E1EE"/>
             </a:solidFill>
           </a:ln>
           <a:effectLst/>
@@ -6467,7 +6467,7 @@
             <a:avLst/>
           </a:prstGeom>
           <a:solidFill>
-            <a:srgbClr val="2457D6"/>
+            <a:srgbClr val="1E7F5B"/>
           </a:solidFill>
           <a:ln>
             <a:noFill/>
@@ -6553,7 +6553,7 @@
             <a:r>
               <a:rPr sz="3150" b="1">
                 <a:solidFill>
-                  <a:srgbClr val="1E2A6E"/>
+                  <a:srgbClr val="1E3E69"/>
                 </a:solidFill>
                 <a:latin typeface="Pretendard"/>
                 <a:ea typeface="Pretendard"/>
@@ -6618,7 +6618,7 @@
             <a:avLst/>
           </a:prstGeom>
           <a:solidFill>
-            <a:srgbClr val="DEE3F0"/>
+            <a:srgbClr val="D8E1EE"/>
           </a:solidFill>
           <a:ln>
             <a:noFill/>
@@ -6748,7 +6748,7 @@
             <a:avLst/>
           </a:prstGeom>
           <a:solidFill>
-            <a:srgbClr val="F4F6FC"/>
+            <a:srgbClr val="F3F8F6"/>
           </a:solidFill>
           <a:ln>
             <a:noFill/>
@@ -6778,7 +6778,7 @@
             <a:avLst/>
           </a:prstGeom>
           <a:solidFill>
-            <a:srgbClr val="F6F6F9"/>
+            <a:srgbClr val="F6F7F9"/>
           </a:solidFill>
           <a:ln>
             <a:noFill/>
@@ -6808,7 +6808,7 @@
             <a:avLst/>
           </a:prstGeom>
           <a:solidFill>
-            <a:srgbClr val="1E2A6E"/>
+            <a:srgbClr val="1E3E69"/>
           </a:solidFill>
           <a:ln>
             <a:noFill/>
@@ -6853,7 +6853,7 @@
             <a:r>
               <a:rPr sz="2400" b="1">
                 <a:solidFill>
-                  <a:srgbClr val="2457D6"/>
+                  <a:srgbClr val="1E7F5B"/>
                 </a:solidFill>
                 <a:latin typeface="Pretendard"/>
                 <a:ea typeface="Pretendard"/>
@@ -6894,7 +6894,7 @@
             <a:r>
               <a:rPr sz="6600" b="1">
                 <a:solidFill>
-                  <a:srgbClr val="1E2A6E"/>
+                  <a:srgbClr val="1E3E69"/>
                 </a:solidFill>
                 <a:latin typeface="Pretendard"/>
                 <a:ea typeface="Pretendard"/>
@@ -6961,7 +6961,7 @@
             <a:avLst/>
           </a:prstGeom>
           <a:solidFill>
-            <a:srgbClr val="DEE3F0"/>
+            <a:srgbClr val="D8E1EE"/>
           </a:solidFill>
           <a:ln>
             <a:noFill/>
@@ -7091,7 +7091,7 @@
             <a:avLst/>
           </a:prstGeom>
           <a:solidFill>
-            <a:srgbClr val="F4F6FC"/>
+            <a:srgbClr val="F3F8F6"/>
           </a:solidFill>
           <a:ln>
             <a:noFill/>
@@ -7151,7 +7151,7 @@
             <a:avLst/>
           </a:prstGeom>
           <a:solidFill>
-            <a:srgbClr val="F8F8FA"/>
+            <a:srgbClr val="F8F9FA"/>
           </a:solidFill>
           <a:ln>
             <a:noFill/>
@@ -7196,7 +7196,7 @@
             <a:r>
               <a:rPr sz="1950" b="1" spc="160">
                 <a:solidFill>
-                  <a:srgbClr val="2457D6"/>
+                  <a:srgbClr val="1E7F5B"/>
                 </a:solidFill>
                 <a:latin typeface="Pretendard"/>
                 <a:ea typeface="Pretendard"/>
@@ -7237,7 +7237,7 @@
             <a:r>
               <a:rPr sz="5100" b="1">
                 <a:solidFill>
-                  <a:srgbClr val="1E2A6E"/>
+                  <a:srgbClr val="1E3E69"/>
                 </a:solidFill>
                 <a:latin typeface="Pretendard"/>
                 <a:ea typeface="Pretendard"/>
@@ -7263,7 +7263,7 @@
             <a:avLst/>
           </a:prstGeom>
           <a:solidFill>
-            <a:srgbClr val="1E2A6E"/>
+            <a:srgbClr val="1E3E69"/>
           </a:solidFill>
           <a:ln>
             <a:noFill/>
@@ -7295,11 +7295,11 @@
             </a:avLst>
           </a:prstGeom>
           <a:solidFill>
-            <a:srgbClr val="F6F8FD"/>
+            <a:srgbClr val="F4F7FA"/>
           </a:solidFill>
           <a:ln w="9525">
             <a:solidFill>
-              <a:srgbClr val="DEE3F0"/>
+              <a:srgbClr val="D8E1EE"/>
             </a:solidFill>
           </a:ln>
           <a:effectLst/>
@@ -7327,7 +7327,7 @@
             <a:avLst/>
           </a:prstGeom>
           <a:solidFill>
-            <a:srgbClr val="2457D6"/>
+            <a:srgbClr val="1E7F5B"/>
           </a:solidFill>
           <a:ln>
             <a:noFill/>
@@ -7413,7 +7413,7 @@
             <a:r>
               <a:rPr sz="3150" b="1">
                 <a:solidFill>
-                  <a:srgbClr val="1E2A6E"/>
+                  <a:srgbClr val="1E3E69"/>
                 </a:solidFill>
                 <a:latin typeface="Pretendard"/>
                 <a:ea typeface="Pretendard"/>
@@ -7480,11 +7480,11 @@
             </a:avLst>
           </a:prstGeom>
           <a:solidFill>
-            <a:srgbClr val="1E2A6E"/>
+            <a:srgbClr val="1E3E69"/>
           </a:solidFill>
           <a:ln w="9525">
             <a:solidFill>
-              <a:srgbClr val="1E2A6E"/>
+              <a:srgbClr val="1E3E69"/>
             </a:solidFill>
           </a:ln>
           <a:effectLst/>
@@ -7512,7 +7512,7 @@
             <a:avLst/>
           </a:prstGeom>
           <a:solidFill>
-            <a:srgbClr val="2457D6"/>
+            <a:srgbClr val="1E7F5B"/>
           </a:solidFill>
           <a:ln>
             <a:noFill/>
@@ -7665,11 +7665,11 @@
             </a:avLst>
           </a:prstGeom>
           <a:solidFill>
-            <a:srgbClr val="F6F8FD"/>
+            <a:srgbClr val="F4F7FA"/>
           </a:solidFill>
           <a:ln w="9525">
             <a:solidFill>
-              <a:srgbClr val="DEE3F0"/>
+              <a:srgbClr val="D8E1EE"/>
             </a:solidFill>
           </a:ln>
           <a:effectLst/>
@@ -7697,7 +7697,7 @@
             <a:avLst/>
           </a:prstGeom>
           <a:solidFill>
-            <a:srgbClr val="2457D6"/>
+            <a:srgbClr val="1E7F5B"/>
           </a:solidFill>
           <a:ln>
             <a:noFill/>
@@ -7783,7 +7783,7 @@
             <a:r>
               <a:rPr sz="3150" b="1">
                 <a:solidFill>
-                  <a:srgbClr val="1E2A6E"/>
+                  <a:srgbClr val="1E3E69"/>
                 </a:solidFill>
                 <a:latin typeface="Pretendard"/>
                 <a:ea typeface="Pretendard"/>
@@ -7848,7 +7848,7 @@
             <a:avLst/>
           </a:prstGeom>
           <a:solidFill>
-            <a:srgbClr val="DEE3F0"/>
+            <a:srgbClr val="D8E1EE"/>
           </a:solidFill>
           <a:ln>
             <a:noFill/>
@@ -7978,7 +7978,7 @@
             <a:avLst/>
           </a:prstGeom>
           <a:solidFill>
-            <a:srgbClr val="F4F6FC"/>
+            <a:srgbClr val="F3F8F6"/>
           </a:solidFill>
           <a:ln>
             <a:noFill/>
@@ -8038,7 +8038,7 @@
             <a:avLst/>
           </a:prstGeom>
           <a:solidFill>
-            <a:srgbClr val="F8F8FA"/>
+            <a:srgbClr val="F8F9FA"/>
           </a:solidFill>
           <a:ln>
             <a:noFill/>
@@ -8083,7 +8083,7 @@
             <a:r>
               <a:rPr sz="1950" b="1" spc="160">
                 <a:solidFill>
-                  <a:srgbClr val="2457D6"/>
+                  <a:srgbClr val="1E7F5B"/>
                 </a:solidFill>
                 <a:latin typeface="Pretendard"/>
                 <a:ea typeface="Pretendard"/>
@@ -8124,7 +8124,7 @@
             <a:r>
               <a:rPr sz="5100" b="1">
                 <a:solidFill>
-                  <a:srgbClr val="1E2A6E"/>
+                  <a:srgbClr val="1E3E69"/>
                 </a:solidFill>
                 <a:latin typeface="Pretendard"/>
                 <a:ea typeface="Pretendard"/>
@@ -8150,7 +8150,7 @@
             <a:avLst/>
           </a:prstGeom>
           <a:solidFill>
-            <a:srgbClr val="1E2A6E"/>
+            <a:srgbClr val="1E3E69"/>
           </a:solidFill>
           <a:ln>
             <a:noFill/>
@@ -8180,7 +8180,7 @@
             <a:avLst/>
           </a:prstGeom>
           <a:solidFill>
-            <a:srgbClr val="1E2A6E"/>
+            <a:srgbClr val="1E3E69"/>
           </a:solidFill>
           <a:ln>
             <a:noFill/>
@@ -8251,7 +8251,7 @@
             <a:avLst/>
           </a:prstGeom>
           <a:solidFill>
-            <a:srgbClr val="2457D6"/>
+            <a:srgbClr val="1E7F5B"/>
           </a:solidFill>
           <a:ln>
             <a:noFill/>
@@ -8322,7 +8322,7 @@
             <a:avLst/>
           </a:prstGeom>
           <a:solidFill>
-            <a:srgbClr val="2457D6"/>
+            <a:srgbClr val="1E7F5B"/>
           </a:solidFill>
           <a:ln>
             <a:noFill/>
@@ -8393,7 +8393,7 @@
             <a:avLst/>
           </a:prstGeom>
           <a:solidFill>
-            <a:srgbClr val="2457D6"/>
+            <a:srgbClr val="1E7F5B"/>
           </a:solidFill>
           <a:ln>
             <a:noFill/>
@@ -8466,11 +8466,11 @@
             </a:avLst>
           </a:prstGeom>
           <a:solidFill>
-            <a:srgbClr val="EAF0FF"/>
+            <a:srgbClr val="E6F4EE"/>
           </a:solidFill>
           <a:ln w="9525">
             <a:solidFill>
-              <a:srgbClr val="C9D7FF"/>
+              <a:srgbClr val="C3E6D8"/>
             </a:solidFill>
           </a:ln>
           <a:effectLst/>
@@ -8513,7 +8513,7 @@
             <a:r>
               <a:rPr sz="1875" b="1">
                 <a:solidFill>
-                  <a:srgbClr val="1E2A6E"/>
+                  <a:srgbClr val="1E3E69"/>
                 </a:solidFill>
                 <a:latin typeface="Pretendard"/>
                 <a:ea typeface="Pretendard"/>
@@ -8541,11 +8541,11 @@
             </a:avLst>
           </a:prstGeom>
           <a:solidFill>
-            <a:srgbClr val="F6F8FD"/>
+            <a:srgbClr val="F4F7FA"/>
           </a:solidFill>
           <a:ln w="9525">
             <a:solidFill>
-              <a:srgbClr val="DEE3F0"/>
+              <a:srgbClr val="D8E1EE"/>
             </a:solidFill>
           </a:ln>
           <a:effectLst/>
@@ -8616,11 +8616,11 @@
             </a:avLst>
           </a:prstGeom>
           <a:solidFill>
-            <a:srgbClr val="F6F8FD"/>
+            <a:srgbClr val="F4F7FA"/>
           </a:solidFill>
           <a:ln w="9525">
             <a:solidFill>
-              <a:srgbClr val="DEE3F0"/>
+              <a:srgbClr val="D8E1EE"/>
             </a:solidFill>
           </a:ln>
           <a:effectLst/>
@@ -8691,11 +8691,11 @@
             </a:avLst>
           </a:prstGeom>
           <a:solidFill>
-            <a:srgbClr val="F6F8FD"/>
+            <a:srgbClr val="F4F7FA"/>
           </a:solidFill>
           <a:ln w="9525">
             <a:solidFill>
-              <a:srgbClr val="DEE3F0"/>
+              <a:srgbClr val="D8E1EE"/>
             </a:solidFill>
           </a:ln>
           <a:effectLst/>
@@ -8766,11 +8766,11 @@
             </a:avLst>
           </a:prstGeom>
           <a:solidFill>
-            <a:srgbClr val="EAF0FF"/>
+            <a:srgbClr val="E6F4EE"/>
           </a:solidFill>
           <a:ln w="9525">
             <a:solidFill>
-              <a:srgbClr val="C9D7FF"/>
+              <a:srgbClr val="C3E6D8"/>
             </a:solidFill>
           </a:ln>
           <a:effectLst/>
@@ -8813,7 +8813,7 @@
             <a:r>
               <a:rPr sz="1875" b="1">
                 <a:solidFill>
-                  <a:srgbClr val="1E2A6E"/>
+                  <a:srgbClr val="1E3E69"/>
                 </a:solidFill>
                 <a:latin typeface="Pretendard"/>
                 <a:ea typeface="Pretendard"/>
@@ -8841,11 +8841,11 @@
             </a:avLst>
           </a:prstGeom>
           <a:solidFill>
-            <a:srgbClr val="F6F8FD"/>
+            <a:srgbClr val="F4F7FA"/>
           </a:solidFill>
           <a:ln w="9525">
             <a:solidFill>
-              <a:srgbClr val="DEE3F0"/>
+              <a:srgbClr val="D8E1EE"/>
             </a:solidFill>
           </a:ln>
           <a:effectLst/>
@@ -8916,11 +8916,11 @@
             </a:avLst>
           </a:prstGeom>
           <a:solidFill>
-            <a:srgbClr val="F6F8FD"/>
+            <a:srgbClr val="F4F7FA"/>
           </a:solidFill>
           <a:ln w="9525">
             <a:solidFill>
-              <a:srgbClr val="DEE3F0"/>
+              <a:srgbClr val="D8E1EE"/>
             </a:solidFill>
           </a:ln>
           <a:effectLst/>
@@ -8991,11 +8991,11 @@
             </a:avLst>
           </a:prstGeom>
           <a:solidFill>
-            <a:srgbClr val="F6F8FD"/>
+            <a:srgbClr val="F4F7FA"/>
           </a:solidFill>
           <a:ln w="9525">
             <a:solidFill>
-              <a:srgbClr val="DEE3F0"/>
+              <a:srgbClr val="D8E1EE"/>
             </a:solidFill>
           </a:ln>
           <a:effectLst/>
@@ -9066,11 +9066,11 @@
             </a:avLst>
           </a:prstGeom>
           <a:solidFill>
-            <a:srgbClr val="EAF0FF"/>
+            <a:srgbClr val="E6F4EE"/>
           </a:solidFill>
           <a:ln w="9525">
             <a:solidFill>
-              <a:srgbClr val="C9D7FF"/>
+              <a:srgbClr val="C3E6D8"/>
             </a:solidFill>
           </a:ln>
           <a:effectLst/>
@@ -9113,7 +9113,7 @@
             <a:r>
               <a:rPr sz="1875" b="1">
                 <a:solidFill>
-                  <a:srgbClr val="1E2A6E"/>
+                  <a:srgbClr val="1E3E69"/>
                 </a:solidFill>
                 <a:latin typeface="Pretendard"/>
                 <a:ea typeface="Pretendard"/>
@@ -9141,11 +9141,11 @@
             </a:avLst>
           </a:prstGeom>
           <a:solidFill>
-            <a:srgbClr val="F6F8FD"/>
+            <a:srgbClr val="F4F7FA"/>
           </a:solidFill>
           <a:ln w="9525">
             <a:solidFill>
-              <a:srgbClr val="DEE3F0"/>
+              <a:srgbClr val="D8E1EE"/>
             </a:solidFill>
           </a:ln>
           <a:effectLst/>
@@ -9216,11 +9216,11 @@
             </a:avLst>
           </a:prstGeom>
           <a:solidFill>
-            <a:srgbClr val="F6F8FD"/>
+            <a:srgbClr val="F4F7FA"/>
           </a:solidFill>
           <a:ln w="9525">
             <a:solidFill>
-              <a:srgbClr val="DEE3F0"/>
+              <a:srgbClr val="D8E1EE"/>
             </a:solidFill>
           </a:ln>
           <a:effectLst/>
@@ -9291,11 +9291,11 @@
             </a:avLst>
           </a:prstGeom>
           <a:solidFill>
-            <a:srgbClr val="F6F8FD"/>
+            <a:srgbClr val="F4F7FA"/>
           </a:solidFill>
           <a:ln w="9525">
             <a:solidFill>
-              <a:srgbClr val="DEE3F0"/>
+              <a:srgbClr val="D8E1EE"/>
             </a:solidFill>
           </a:ln>
           <a:effectLst/>
@@ -9366,11 +9366,11 @@
             </a:avLst>
           </a:prstGeom>
           <a:solidFill>
-            <a:srgbClr val="EAF0FF"/>
+            <a:srgbClr val="E6F4EE"/>
           </a:solidFill>
           <a:ln w="9525">
             <a:solidFill>
-              <a:srgbClr val="C9D7FF"/>
+              <a:srgbClr val="C3E6D8"/>
             </a:solidFill>
           </a:ln>
           <a:effectLst/>
@@ -9413,7 +9413,7 @@
             <a:r>
               <a:rPr sz="1875" b="1">
                 <a:solidFill>
-                  <a:srgbClr val="1E2A6E"/>
+                  <a:srgbClr val="1E3E69"/>
                 </a:solidFill>
                 <a:latin typeface="Pretendard"/>
                 <a:ea typeface="Pretendard"/>
@@ -9441,11 +9441,11 @@
             </a:avLst>
           </a:prstGeom>
           <a:solidFill>
-            <a:srgbClr val="F6F8FD"/>
+            <a:srgbClr val="F4F7FA"/>
           </a:solidFill>
           <a:ln w="9525">
             <a:solidFill>
-              <a:srgbClr val="DEE3F0"/>
+              <a:srgbClr val="D8E1EE"/>
             </a:solidFill>
           </a:ln>
           <a:effectLst/>
@@ -9516,11 +9516,11 @@
             </a:avLst>
           </a:prstGeom>
           <a:solidFill>
-            <a:srgbClr val="F6F8FD"/>
+            <a:srgbClr val="F4F7FA"/>
           </a:solidFill>
           <a:ln w="9525">
             <a:solidFill>
-              <a:srgbClr val="DEE3F0"/>
+              <a:srgbClr val="D8E1EE"/>
             </a:solidFill>
           </a:ln>
           <a:effectLst/>
@@ -9591,11 +9591,11 @@
             </a:avLst>
           </a:prstGeom>
           <a:solidFill>
-            <a:srgbClr val="F6F8FD"/>
+            <a:srgbClr val="F4F7FA"/>
           </a:solidFill>
           <a:ln w="9525">
             <a:solidFill>
-              <a:srgbClr val="DEE3F0"/>
+              <a:srgbClr val="D8E1EE"/>
             </a:solidFill>
           </a:ln>
           <a:effectLst/>
@@ -9666,11 +9666,11 @@
             </a:avLst>
           </a:prstGeom>
           <a:solidFill>
-            <a:srgbClr val="EAF0FF"/>
+            <a:srgbClr val="E6F4EE"/>
           </a:solidFill>
           <a:ln w="9525">
             <a:solidFill>
-              <a:srgbClr val="C9D7FF"/>
+              <a:srgbClr val="C3E6D8"/>
             </a:solidFill>
           </a:ln>
           <a:effectLst/>
@@ -9713,7 +9713,7 @@
             <a:r>
               <a:rPr sz="1875" b="1">
                 <a:solidFill>
-                  <a:srgbClr val="1E2A6E"/>
+                  <a:srgbClr val="1E3E69"/>
                 </a:solidFill>
                 <a:latin typeface="Pretendard"/>
                 <a:ea typeface="Pretendard"/>
@@ -9741,11 +9741,11 @@
             </a:avLst>
           </a:prstGeom>
           <a:solidFill>
-            <a:srgbClr val="F6F8FD"/>
+            <a:srgbClr val="F4F7FA"/>
           </a:solidFill>
           <a:ln w="9525">
             <a:solidFill>
-              <a:srgbClr val="DEE3F0"/>
+              <a:srgbClr val="D8E1EE"/>
             </a:solidFill>
           </a:ln>
           <a:effectLst/>
@@ -9816,11 +9816,11 @@
             </a:avLst>
           </a:prstGeom>
           <a:solidFill>
-            <a:srgbClr val="F6F8FD"/>
+            <a:srgbClr val="F4F7FA"/>
           </a:solidFill>
           <a:ln w="9525">
             <a:solidFill>
-              <a:srgbClr val="DEE3F0"/>
+              <a:srgbClr val="D8E1EE"/>
             </a:solidFill>
           </a:ln>
           <a:effectLst/>
@@ -9891,11 +9891,11 @@
             </a:avLst>
           </a:prstGeom>
           <a:solidFill>
-            <a:srgbClr val="F6F8FD"/>
+            <a:srgbClr val="F4F7FA"/>
           </a:solidFill>
           <a:ln w="9525">
             <a:solidFill>
-              <a:srgbClr val="DEE3F0"/>
+              <a:srgbClr val="D8E1EE"/>
             </a:solidFill>
           </a:ln>
           <a:effectLst/>
@@ -10005,7 +10005,7 @@
             <a:avLst/>
           </a:prstGeom>
           <a:solidFill>
-            <a:srgbClr val="DEE3F0"/>
+            <a:srgbClr val="D8E1EE"/>
           </a:solidFill>
           <a:ln>
             <a:noFill/>
@@ -10135,7 +10135,7 @@
             <a:avLst/>
           </a:prstGeom>
           <a:solidFill>
-            <a:srgbClr val="F4F6FC"/>
+            <a:srgbClr val="F3F8F6"/>
           </a:solidFill>
           <a:ln>
             <a:noFill/>
@@ -10195,7 +10195,7 @@
             <a:avLst/>
           </a:prstGeom>
           <a:solidFill>
-            <a:srgbClr val="F8F8FA"/>
+            <a:srgbClr val="F8F9FA"/>
           </a:solidFill>
           <a:ln>
             <a:noFill/>
@@ -10227,7 +10227,7 @@
             </a:avLst>
           </a:prstGeom>
           <a:solidFill>
-            <a:srgbClr val="2457D6"/>
+            <a:srgbClr val="1E7F5B"/>
           </a:solidFill>
           <a:ln>
             <a:noFill/>
@@ -10343,7 +10343,7 @@
             <a:r>
               <a:rPr sz="1950" b="1" spc="160">
                 <a:solidFill>
-                  <a:srgbClr val="2457D6"/>
+                  <a:srgbClr val="1E7F5B"/>
                 </a:solidFill>
                 <a:latin typeface="Pretendard"/>
                 <a:ea typeface="Pretendard"/>
@@ -10384,7 +10384,7 @@
             <a:r>
               <a:rPr sz="5100" b="1">
                 <a:solidFill>
-                  <a:srgbClr val="1E2A6E"/>
+                  <a:srgbClr val="1E3E69"/>
                 </a:solidFill>
                 <a:latin typeface="Pretendard"/>
                 <a:ea typeface="Pretendard"/>
@@ -10410,7 +10410,7 @@
             <a:avLst/>
           </a:prstGeom>
           <a:solidFill>
-            <a:srgbClr val="1E2A6E"/>
+            <a:srgbClr val="1E3E69"/>
           </a:solidFill>
           <a:ln>
             <a:noFill/>
@@ -10455,7 +10455,7 @@
             <a:r>
               <a:rPr sz="2250" b="1">
                 <a:solidFill>
-                  <a:srgbClr val="2457D6"/>
+                  <a:srgbClr val="1E7F5B"/>
                 </a:solidFill>
                 <a:latin typeface="Pretendard"/>
                 <a:ea typeface="Pretendard"/>
@@ -10483,11 +10483,11 @@
             </a:avLst>
           </a:prstGeom>
           <a:solidFill>
-            <a:srgbClr val="F6F8FD"/>
+            <a:srgbClr val="F4F7FA"/>
           </a:solidFill>
           <a:ln w="9525">
             <a:solidFill>
-              <a:srgbClr val="DEE3F0"/>
+              <a:srgbClr val="D8E1EE"/>
             </a:solidFill>
           </a:ln>
           <a:effectLst/>
@@ -10515,7 +10515,7 @@
             <a:avLst/>
           </a:prstGeom>
           <a:solidFill>
-            <a:srgbClr val="1E2A6E"/>
+            <a:srgbClr val="1E3E69"/>
           </a:solidFill>
           <a:ln>
             <a:noFill/>
@@ -10601,7 +10601,7 @@
             <a:r>
               <a:rPr sz="2700" b="1">
                 <a:solidFill>
-                  <a:srgbClr val="1E2A6E"/>
+                  <a:srgbClr val="1E3E69"/>
                 </a:solidFill>
                 <a:latin typeface="Pretendard"/>
                 <a:ea typeface="Pretendard"/>
@@ -10627,7 +10627,7 @@
             <a:avLst/>
           </a:prstGeom>
           <a:solidFill>
-            <a:srgbClr val="2457D6"/>
+            <a:srgbClr val="1E7F5B"/>
           </a:solidFill>
           <a:ln>
             <a:noFill/>
@@ -10672,7 +10672,7 @@
             <a:r>
               <a:rPr sz="1875" b="1" spc="150">
                 <a:solidFill>
-                  <a:srgbClr val="2457D6"/>
+                  <a:srgbClr val="1E7F5B"/>
                 </a:solidFill>
                 <a:latin typeface="Pretendard"/>
                 <a:ea typeface="Pretendard"/>
@@ -10713,7 +10713,7 @@
             <a:r>
               <a:rPr sz="2475" b="1">
                 <a:solidFill>
-                  <a:srgbClr val="1E2A6E"/>
+                  <a:srgbClr val="1E3E69"/>
                 </a:solidFill>
                 <a:latin typeface="Pretendard"/>
                 <a:ea typeface="Pretendard"/>
@@ -10739,7 +10739,7 @@
             <a:avLst/>
           </a:prstGeom>
           <a:solidFill>
-            <a:srgbClr val="DEE3F0"/>
+            <a:srgbClr val="D8E1EE"/>
           </a:solidFill>
           <a:ln>
             <a:noFill/>
@@ -10869,7 +10869,7 @@
             <a:avLst/>
           </a:prstGeom>
           <a:solidFill>
-            <a:srgbClr val="F4F6FC"/>
+            <a:srgbClr val="F3F8F6"/>
           </a:solidFill>
           <a:ln>
             <a:noFill/>
@@ -10929,7 +10929,7 @@
             <a:avLst/>
           </a:prstGeom>
           <a:solidFill>
-            <a:srgbClr val="F8F8FA"/>
+            <a:srgbClr val="F8F9FA"/>
           </a:solidFill>
           <a:ln>
             <a:noFill/>
@@ -10974,7 +10974,7 @@
             <a:r>
               <a:rPr sz="1950" b="1" spc="160">
                 <a:solidFill>
-                  <a:srgbClr val="2457D6"/>
+                  <a:srgbClr val="1E7F5B"/>
                 </a:solidFill>
                 <a:latin typeface="Pretendard"/>
                 <a:ea typeface="Pretendard"/>
@@ -11015,7 +11015,7 @@
             <a:r>
               <a:rPr sz="5100" b="1">
                 <a:solidFill>
-                  <a:srgbClr val="1E2A6E"/>
+                  <a:srgbClr val="1E3E69"/>
                 </a:solidFill>
                 <a:latin typeface="Pretendard"/>
                 <a:ea typeface="Pretendard"/>
@@ -11041,7 +11041,7 @@
             <a:avLst/>
           </a:prstGeom>
           <a:solidFill>
-            <a:srgbClr val="1E2A6E"/>
+            <a:srgbClr val="1E3E69"/>
           </a:solidFill>
           <a:ln>
             <a:noFill/>
@@ -11361,7 +11361,7 @@
             <a:r>
               <a:rPr sz="2175" b="1">
                 <a:solidFill>
-                  <a:srgbClr val="1E2A6E"/>
+                  <a:srgbClr val="1E3E69"/>
                 </a:solidFill>
                 <a:latin typeface="Pretendard"/>
                 <a:ea typeface="Pretendard"/>
@@ -11387,7 +11387,7 @@
             <a:avLst/>
           </a:prstGeom>
           <a:solidFill>
-            <a:srgbClr val="DEE3F0"/>
+            <a:srgbClr val="D8E1EE"/>
           </a:solidFill>
           <a:ln>
             <a:noFill/>
@@ -11565,7 +11565,7 @@
             <a:r>
               <a:rPr sz="2175" b="1">
                 <a:solidFill>
-                  <a:srgbClr val="1E2A6E"/>
+                  <a:srgbClr val="1E3E69"/>
                 </a:solidFill>
                 <a:latin typeface="Pretendard"/>
                 <a:ea typeface="Pretendard"/>
@@ -11739,7 +11739,7 @@
             <a:r>
               <a:rPr sz="2175" b="1">
                 <a:solidFill>
-                  <a:srgbClr val="1E2A6E"/>
+                  <a:srgbClr val="1E3E69"/>
                 </a:solidFill>
                 <a:latin typeface="Pretendard"/>
                 <a:ea typeface="Pretendard"/>
@@ -11765,7 +11765,7 @@
             <a:avLst/>
           </a:prstGeom>
           <a:solidFill>
-            <a:srgbClr val="DEE3F0"/>
+            <a:srgbClr val="D8E1EE"/>
           </a:solidFill>
           <a:ln>
             <a:noFill/>
@@ -11943,7 +11943,7 @@
             <a:r>
               <a:rPr sz="2175" b="1">
                 <a:solidFill>
-                  <a:srgbClr val="1E2A6E"/>
+                  <a:srgbClr val="1E3E69"/>
                 </a:solidFill>
                 <a:latin typeface="Pretendard"/>
                 <a:ea typeface="Pretendard"/>
@@ -12117,7 +12117,7 @@
             <a:r>
               <a:rPr sz="2175" b="1">
                 <a:solidFill>
-                  <a:srgbClr val="1E2A6E"/>
+                  <a:srgbClr val="1E3E69"/>
                 </a:solidFill>
                 <a:latin typeface="Pretendard"/>
                 <a:ea typeface="Pretendard"/>
@@ -12143,7 +12143,7 @@
             <a:avLst/>
           </a:prstGeom>
           <a:solidFill>
-            <a:srgbClr val="DEE3F0"/>
+            <a:srgbClr val="D8E1EE"/>
           </a:solidFill>
           <a:ln>
             <a:noFill/>
@@ -12321,7 +12321,7 @@
             <a:r>
               <a:rPr sz="2175" b="1">
                 <a:solidFill>
-                  <a:srgbClr val="1E2A6E"/>
+                  <a:srgbClr val="1E3E69"/>
                 </a:solidFill>
                 <a:latin typeface="Pretendard"/>
                 <a:ea typeface="Pretendard"/>
@@ -12495,7 +12495,7 @@
             <a:r>
               <a:rPr sz="2175" b="1">
                 <a:solidFill>
-                  <a:srgbClr val="1E2A6E"/>
+                  <a:srgbClr val="1E3E69"/>
                 </a:solidFill>
                 <a:latin typeface="Pretendard"/>
                 <a:ea typeface="Pretendard"/>
@@ -12521,7 +12521,7 @@
             <a:avLst/>
           </a:prstGeom>
           <a:solidFill>
-            <a:srgbClr val="DEE3F0"/>
+            <a:srgbClr val="D8E1EE"/>
           </a:solidFill>
           <a:ln>
             <a:noFill/>
@@ -12699,7 +12699,7 @@
             <a:r>
               <a:rPr sz="2175" b="1">
                 <a:solidFill>
-                  <a:srgbClr val="1E2A6E"/>
+                  <a:srgbClr val="1E3E69"/>
                 </a:solidFill>
                 <a:latin typeface="Pretendard"/>
                 <a:ea typeface="Pretendard"/>
@@ -12725,7 +12725,7 @@
             <a:avLst/>
           </a:prstGeom>
           <a:solidFill>
-            <a:srgbClr val="DEE3F0"/>
+            <a:srgbClr val="D8E1EE"/>
           </a:solidFill>
           <a:ln>
             <a:noFill/>
@@ -12855,7 +12855,7 @@
             <a:avLst/>
           </a:prstGeom>
           <a:solidFill>
-            <a:srgbClr val="F4F6FC"/>
+            <a:srgbClr val="F3F8F6"/>
           </a:solidFill>
           <a:ln>
             <a:noFill/>
@@ -12915,7 +12915,7 @@
             <a:avLst/>
           </a:prstGeom>
           <a:solidFill>
-            <a:srgbClr val="F8F8FA"/>
+            <a:srgbClr val="F8F9FA"/>
           </a:solidFill>
           <a:ln>
             <a:noFill/>
@@ -12947,7 +12947,7 @@
             </a:avLst>
           </a:prstGeom>
           <a:solidFill>
-            <a:srgbClr val="2457D6"/>
+            <a:srgbClr val="1E7F5B"/>
           </a:solidFill>
           <a:ln>
             <a:noFill/>
@@ -13063,7 +13063,7 @@
             <a:r>
               <a:rPr sz="1950" b="1" spc="160">
                 <a:solidFill>
-                  <a:srgbClr val="2457D6"/>
+                  <a:srgbClr val="1E7F5B"/>
                 </a:solidFill>
                 <a:latin typeface="Pretendard"/>
                 <a:ea typeface="Pretendard"/>
@@ -13104,7 +13104,7 @@
             <a:r>
               <a:rPr sz="5100" b="1">
                 <a:solidFill>
-                  <a:srgbClr val="1E2A6E"/>
+                  <a:srgbClr val="1E3E69"/>
                 </a:solidFill>
                 <a:latin typeface="Pretendard"/>
                 <a:ea typeface="Pretendard"/>
@@ -13130,7 +13130,7 @@
             <a:avLst/>
           </a:prstGeom>
           <a:solidFill>
-            <a:srgbClr val="1E2A6E"/>
+            <a:srgbClr val="1E3E69"/>
           </a:solidFill>
           <a:ln>
             <a:noFill/>
@@ -13175,7 +13175,7 @@
             <a:r>
               <a:rPr sz="2250" b="1">
                 <a:solidFill>
-                  <a:srgbClr val="2457D6"/>
+                  <a:srgbClr val="1E7F5B"/>
                 </a:solidFill>
                 <a:latin typeface="Pretendard"/>
                 <a:ea typeface="Pretendard"/>
@@ -13203,11 +13203,11 @@
             </a:avLst>
           </a:prstGeom>
           <a:solidFill>
-            <a:srgbClr val="F6F8FD"/>
+            <a:srgbClr val="F4F7FA"/>
           </a:solidFill>
           <a:ln w="9525">
             <a:solidFill>
-              <a:srgbClr val="DEE3F0"/>
+              <a:srgbClr val="D8E1EE"/>
             </a:solidFill>
           </a:ln>
           <a:effectLst/>
@@ -13235,7 +13235,7 @@
             <a:avLst/>
           </a:prstGeom>
           <a:solidFill>
-            <a:srgbClr val="1E2A6E"/>
+            <a:srgbClr val="1E3E69"/>
           </a:solidFill>
           <a:ln>
             <a:noFill/>
@@ -13321,7 +13321,7 @@
             <a:r>
               <a:rPr sz="2700" b="1">
                 <a:solidFill>
-                  <a:srgbClr val="1E2A6E"/>
+                  <a:srgbClr val="1E3E69"/>
                 </a:solidFill>
                 <a:latin typeface="Pretendard"/>
                 <a:ea typeface="Pretendard"/>
@@ -13347,7 +13347,7 @@
             <a:avLst/>
           </a:prstGeom>
           <a:solidFill>
-            <a:srgbClr val="2457D6"/>
+            <a:srgbClr val="1E7F5B"/>
           </a:solidFill>
           <a:ln>
             <a:noFill/>
@@ -13392,7 +13392,7 @@
             <a:r>
               <a:rPr sz="1875" b="1" spc="150">
                 <a:solidFill>
-                  <a:srgbClr val="2457D6"/>
+                  <a:srgbClr val="1E7F5B"/>
                 </a:solidFill>
                 <a:latin typeface="Pretendard"/>
                 <a:ea typeface="Pretendard"/>
@@ -13433,7 +13433,7 @@
             <a:r>
               <a:rPr sz="2475" b="1">
                 <a:solidFill>
-                  <a:srgbClr val="1E2A6E"/>
+                  <a:srgbClr val="1E3E69"/>
                 </a:solidFill>
                 <a:latin typeface="Pretendard"/>
                 <a:ea typeface="Pretendard"/>
@@ -13459,7 +13459,7 @@
             <a:avLst/>
           </a:prstGeom>
           <a:solidFill>
-            <a:srgbClr val="DEE3F0"/>
+            <a:srgbClr val="D8E1EE"/>
           </a:solidFill>
           <a:ln>
             <a:noFill/>
@@ -13589,7 +13589,7 @@
             <a:avLst/>
           </a:prstGeom>
           <a:solidFill>
-            <a:srgbClr val="F4F6FC"/>
+            <a:srgbClr val="F3F8F6"/>
           </a:solidFill>
           <a:ln>
             <a:noFill/>
@@ -13649,7 +13649,7 @@
             <a:avLst/>
           </a:prstGeom>
           <a:solidFill>
-            <a:srgbClr val="F8F8FA"/>
+            <a:srgbClr val="F8F9FA"/>
           </a:solidFill>
           <a:ln>
             <a:noFill/>
@@ -13694,7 +13694,7 @@
             <a:r>
               <a:rPr sz="1950" b="1" spc="160">
                 <a:solidFill>
-                  <a:srgbClr val="2457D6"/>
+                  <a:srgbClr val="1E7F5B"/>
                 </a:solidFill>
                 <a:latin typeface="Pretendard"/>
                 <a:ea typeface="Pretendard"/>
@@ -13735,7 +13735,7 @@
             <a:r>
               <a:rPr sz="5100" b="1">
                 <a:solidFill>
-                  <a:srgbClr val="1E2A6E"/>
+                  <a:srgbClr val="1E3E69"/>
                 </a:solidFill>
                 <a:latin typeface="Pretendard"/>
                 <a:ea typeface="Pretendard"/>
@@ -13761,7 +13761,7 @@
             <a:avLst/>
           </a:prstGeom>
           <a:solidFill>
-            <a:srgbClr val="1E2A6E"/>
+            <a:srgbClr val="1E3E69"/>
           </a:solidFill>
           <a:ln>
             <a:noFill/>
@@ -13793,11 +13793,11 @@
             </a:avLst>
           </a:prstGeom>
           <a:solidFill>
-            <a:srgbClr val="F6F8FD"/>
+            <a:srgbClr val="F4F7FA"/>
           </a:solidFill>
           <a:ln w="9525">
             <a:solidFill>
-              <a:srgbClr val="DEE3F0"/>
+              <a:srgbClr val="D8E1EE"/>
             </a:solidFill>
           </a:ln>
           <a:effectLst/>
@@ -13831,7 +13831,7 @@
           </a:solidFill>
           <a:ln w="28575">
             <a:solidFill>
-              <a:srgbClr val="1E2A6E"/>
+              <a:srgbClr val="1E3E69"/>
             </a:solidFill>
           </a:ln>
           <a:effectLst/>
@@ -13874,7 +13874,7 @@
             <a:r>
               <a:rPr sz="2400" b="1">
                 <a:solidFill>
-                  <a:srgbClr val="1E2A6E"/>
+                  <a:srgbClr val="1E3E69"/>
                 </a:solidFill>
                 <a:latin typeface="Pretendard"/>
                 <a:ea typeface="Pretendard"/>
@@ -13902,11 +13902,11 @@
             </a:avLst>
           </a:prstGeom>
           <a:solidFill>
-            <a:srgbClr val="F6F8FD"/>
+            <a:srgbClr val="F4F7FA"/>
           </a:solidFill>
           <a:ln w="9525">
             <a:solidFill>
-              <a:srgbClr val="DEE3F0"/>
+              <a:srgbClr val="D8E1EE"/>
             </a:solidFill>
           </a:ln>
           <a:effectLst/>
@@ -13940,7 +13940,7 @@
           </a:solidFill>
           <a:ln w="28575">
             <a:solidFill>
-              <a:srgbClr val="1E2A6E"/>
+              <a:srgbClr val="1E3E69"/>
             </a:solidFill>
           </a:ln>
           <a:effectLst/>
@@ -13983,7 +13983,7 @@
             <a:r>
               <a:rPr sz="2400" b="1">
                 <a:solidFill>
-                  <a:srgbClr val="1E2A6E"/>
+                  <a:srgbClr val="1E3E69"/>
                 </a:solidFill>
                 <a:latin typeface="Pretendard"/>
                 <a:ea typeface="Pretendard"/>
@@ -14011,11 +14011,11 @@
             </a:avLst>
           </a:prstGeom>
           <a:solidFill>
-            <a:srgbClr val="F6F8FD"/>
+            <a:srgbClr val="F4F7FA"/>
           </a:solidFill>
           <a:ln w="9525">
             <a:solidFill>
-              <a:srgbClr val="DEE3F0"/>
+              <a:srgbClr val="D8E1EE"/>
             </a:solidFill>
           </a:ln>
           <a:effectLst/>
@@ -14049,7 +14049,7 @@
           </a:solidFill>
           <a:ln w="28575">
             <a:solidFill>
-              <a:srgbClr val="1E2A6E"/>
+              <a:srgbClr val="1E3E69"/>
             </a:solidFill>
           </a:ln>
           <a:effectLst/>
@@ -14092,7 +14092,7 @@
             <a:r>
               <a:rPr sz="2400" b="1">
                 <a:solidFill>
-                  <a:srgbClr val="1E2A6E"/>
+                  <a:srgbClr val="1E3E69"/>
                 </a:solidFill>
                 <a:latin typeface="Pretendard"/>
                 <a:ea typeface="Pretendard"/>
@@ -14120,11 +14120,11 @@
             </a:avLst>
           </a:prstGeom>
           <a:solidFill>
-            <a:srgbClr val="F6F8FD"/>
+            <a:srgbClr val="F4F7FA"/>
           </a:solidFill>
           <a:ln w="9525">
             <a:solidFill>
-              <a:srgbClr val="DEE3F0"/>
+              <a:srgbClr val="D8E1EE"/>
             </a:solidFill>
           </a:ln>
           <a:effectLst/>
@@ -14158,7 +14158,7 @@
           </a:solidFill>
           <a:ln w="28575">
             <a:solidFill>
-              <a:srgbClr val="1E2A6E"/>
+              <a:srgbClr val="1E3E69"/>
             </a:solidFill>
           </a:ln>
           <a:effectLst/>
@@ -14201,7 +14201,7 @@
             <a:r>
               <a:rPr sz="2400" b="1">
                 <a:solidFill>
-                  <a:srgbClr val="1E2A6E"/>
+                  <a:srgbClr val="1E3E69"/>
                 </a:solidFill>
                 <a:latin typeface="Pretendard"/>
                 <a:ea typeface="Pretendard"/>
@@ -14229,11 +14229,11 @@
             </a:avLst>
           </a:prstGeom>
           <a:solidFill>
-            <a:srgbClr val="F6F8FD"/>
+            <a:srgbClr val="F4F7FA"/>
           </a:solidFill>
           <a:ln w="9525">
             <a:solidFill>
-              <a:srgbClr val="DEE3F0"/>
+              <a:srgbClr val="D8E1EE"/>
             </a:solidFill>
           </a:ln>
           <a:effectLst/>
@@ -14267,7 +14267,7 @@
           </a:solidFill>
           <a:ln w="28575">
             <a:solidFill>
-              <a:srgbClr val="1E2A6E"/>
+              <a:srgbClr val="1E3E69"/>
             </a:solidFill>
           </a:ln>
           <a:effectLst/>
@@ -14310,7 +14310,7 @@
             <a:r>
               <a:rPr sz="2400" b="1">
                 <a:solidFill>
-                  <a:srgbClr val="1E2A6E"/>
+                  <a:srgbClr val="1E3E69"/>
                 </a:solidFill>
                 <a:latin typeface="Pretendard"/>
                 <a:ea typeface="Pretendard"/>
@@ -14338,11 +14338,11 @@
             </a:avLst>
           </a:prstGeom>
           <a:solidFill>
-            <a:srgbClr val="F6F8FD"/>
+            <a:srgbClr val="F4F7FA"/>
           </a:solidFill>
           <a:ln w="9525">
             <a:solidFill>
-              <a:srgbClr val="DEE3F0"/>
+              <a:srgbClr val="D8E1EE"/>
             </a:solidFill>
           </a:ln>
           <a:effectLst/>
@@ -14376,7 +14376,7 @@
           </a:solidFill>
           <a:ln w="28575">
             <a:solidFill>
-              <a:srgbClr val="1E2A6E"/>
+              <a:srgbClr val="1E3E69"/>
             </a:solidFill>
           </a:ln>
           <a:effectLst/>
@@ -14419,7 +14419,7 @@
             <a:r>
               <a:rPr sz="2400" b="1">
                 <a:solidFill>
-                  <a:srgbClr val="1E2A6E"/>
+                  <a:srgbClr val="1E3E69"/>
                 </a:solidFill>
                 <a:latin typeface="Pretendard"/>
                 <a:ea typeface="Pretendard"/>
@@ -14445,7 +14445,7 @@
             <a:avLst/>
           </a:prstGeom>
           <a:solidFill>
-            <a:srgbClr val="DEE3F0"/>
+            <a:srgbClr val="D8E1EE"/>
           </a:solidFill>
           <a:ln>
             <a:noFill/>
@@ -14575,7 +14575,7 @@
             <a:avLst/>
           </a:prstGeom>
           <a:solidFill>
-            <a:srgbClr val="F4F6FC"/>
+            <a:srgbClr val="F3F8F6"/>
           </a:solidFill>
           <a:ln>
             <a:noFill/>
@@ -14635,7 +14635,7 @@
             <a:avLst/>
           </a:prstGeom>
           <a:solidFill>
-            <a:srgbClr val="F8F8FA"/>
+            <a:srgbClr val="F8F9FA"/>
           </a:solidFill>
           <a:ln>
             <a:noFill/>
@@ -14680,7 +14680,7 @@
             <a:r>
               <a:rPr sz="1950" b="1" spc="160">
                 <a:solidFill>
-                  <a:srgbClr val="2457D6"/>
+                  <a:srgbClr val="1E7F5B"/>
                 </a:solidFill>
                 <a:latin typeface="Pretendard"/>
                 <a:ea typeface="Pretendard"/>
@@ -14721,7 +14721,7 @@
             <a:r>
               <a:rPr sz="5100" b="1">
                 <a:solidFill>
-                  <a:srgbClr val="1E2A6E"/>
+                  <a:srgbClr val="1E3E69"/>
                 </a:solidFill>
                 <a:latin typeface="Pretendard"/>
                 <a:ea typeface="Pretendard"/>
@@ -14747,7 +14747,7 @@
             <a:avLst/>
           </a:prstGeom>
           <a:solidFill>
-            <a:srgbClr val="1E2A6E"/>
+            <a:srgbClr val="1E3E69"/>
           </a:solidFill>
           <a:ln>
             <a:noFill/>
@@ -14779,11 +14779,11 @@
             </a:avLst>
           </a:prstGeom>
           <a:solidFill>
-            <a:srgbClr val="F6F8FD"/>
+            <a:srgbClr val="F4F7FA"/>
           </a:solidFill>
           <a:ln w="9525">
             <a:solidFill>
-              <a:srgbClr val="DEE3F0"/>
+              <a:srgbClr val="D8E1EE"/>
             </a:solidFill>
           </a:ln>
           <a:effectLst/>
@@ -14811,7 +14811,7 @@
             <a:avLst/>
           </a:prstGeom>
           <a:solidFill>
-            <a:srgbClr val="1E2A6E"/>
+            <a:srgbClr val="1E3E69"/>
           </a:solidFill>
           <a:ln>
             <a:noFill/>
@@ -14897,7 +14897,7 @@
             <a:r>
               <a:rPr sz="2325" b="1">
                 <a:solidFill>
-                  <a:srgbClr val="1E2A6E"/>
+                  <a:srgbClr val="1E3E69"/>
                 </a:solidFill>
                 <a:latin typeface="Pretendard"/>
                 <a:ea typeface="Pretendard"/>
@@ -14925,11 +14925,11 @@
             </a:avLst>
           </a:prstGeom>
           <a:solidFill>
-            <a:srgbClr val="F6F8FD"/>
+            <a:srgbClr val="F4F7FA"/>
           </a:solidFill>
           <a:ln w="9525">
             <a:solidFill>
-              <a:srgbClr val="DEE3F0"/>
+              <a:srgbClr val="D8E1EE"/>
             </a:solidFill>
           </a:ln>
           <a:effectLst/>
@@ -14957,7 +14957,7 @@
             <a:avLst/>
           </a:prstGeom>
           <a:solidFill>
-            <a:srgbClr val="1E2A6E"/>
+            <a:srgbClr val="1E3E69"/>
           </a:solidFill>
           <a:ln>
             <a:noFill/>
@@ -15043,7 +15043,7 @@
             <a:r>
               <a:rPr sz="2325" b="1">
                 <a:solidFill>
-                  <a:srgbClr val="1E2A6E"/>
+                  <a:srgbClr val="1E3E69"/>
                 </a:solidFill>
                 <a:latin typeface="Pretendard"/>
                 <a:ea typeface="Pretendard"/>
@@ -15071,11 +15071,11 @@
             </a:avLst>
           </a:prstGeom>
           <a:solidFill>
-            <a:srgbClr val="F6F8FD"/>
+            <a:srgbClr val="F4F7FA"/>
           </a:solidFill>
           <a:ln w="9525">
             <a:solidFill>
-              <a:srgbClr val="DEE3F0"/>
+              <a:srgbClr val="D8E1EE"/>
             </a:solidFill>
           </a:ln>
           <a:effectLst/>
@@ -15103,7 +15103,7 @@
             <a:avLst/>
           </a:prstGeom>
           <a:solidFill>
-            <a:srgbClr val="1E2A6E"/>
+            <a:srgbClr val="1E3E69"/>
           </a:solidFill>
           <a:ln>
             <a:noFill/>
@@ -15189,7 +15189,7 @@
             <a:r>
               <a:rPr sz="2325" b="1">
                 <a:solidFill>
-                  <a:srgbClr val="1E2A6E"/>
+                  <a:srgbClr val="1E3E69"/>
                 </a:solidFill>
                 <a:latin typeface="Pretendard"/>
                 <a:ea typeface="Pretendard"/>
@@ -15217,11 +15217,11 @@
             </a:avLst>
           </a:prstGeom>
           <a:solidFill>
-            <a:srgbClr val="F6F8FD"/>
+            <a:srgbClr val="F4F7FA"/>
           </a:solidFill>
           <a:ln w="9525">
             <a:solidFill>
-              <a:srgbClr val="DEE3F0"/>
+              <a:srgbClr val="D8E1EE"/>
             </a:solidFill>
           </a:ln>
           <a:effectLst/>
@@ -15249,7 +15249,7 @@
             <a:avLst/>
           </a:prstGeom>
           <a:solidFill>
-            <a:srgbClr val="1E2A6E"/>
+            <a:srgbClr val="1E3E69"/>
           </a:solidFill>
           <a:ln>
             <a:noFill/>
@@ -15335,7 +15335,7 @@
             <a:r>
               <a:rPr sz="2325" b="1">
                 <a:solidFill>
-                  <a:srgbClr val="1E2A6E"/>
+                  <a:srgbClr val="1E3E69"/>
                 </a:solidFill>
                 <a:latin typeface="Pretendard"/>
                 <a:ea typeface="Pretendard"/>
@@ -15363,11 +15363,11 @@
             </a:avLst>
           </a:prstGeom>
           <a:solidFill>
-            <a:srgbClr val="EAF0FF"/>
+            <a:srgbClr val="E6F4EE"/>
           </a:solidFill>
           <a:ln w="9525">
             <a:solidFill>
-              <a:srgbClr val="C9D7FF"/>
+              <a:srgbClr val="C3E6D8"/>
             </a:solidFill>
           </a:ln>
           <a:effectLst/>
@@ -15410,7 +15410,7 @@
             <a:r>
               <a:rPr sz="2475" b="1">
                 <a:solidFill>
-                  <a:srgbClr val="1E2A6E"/>
+                  <a:srgbClr val="1E3E69"/>
                 </a:solidFill>
                 <a:latin typeface="Pretendard"/>
                 <a:ea typeface="Pretendard"/>
@@ -15436,7 +15436,7 @@
             <a:avLst/>
           </a:prstGeom>
           <a:solidFill>
-            <a:srgbClr val="DEE3F0"/>
+            <a:srgbClr val="D8E1EE"/>
           </a:solidFill>
           <a:ln>
             <a:noFill/>
@@ -15566,7 +15566,7 @@
             <a:avLst/>
           </a:prstGeom>
           <a:solidFill>
-            <a:srgbClr val="F4F6FC"/>
+            <a:srgbClr val="F3F8F6"/>
           </a:solidFill>
           <a:ln>
             <a:noFill/>
@@ -15626,7 +15626,7 @@
             <a:avLst/>
           </a:prstGeom>
           <a:solidFill>
-            <a:srgbClr val="F8F8FA"/>
+            <a:srgbClr val="F8F9FA"/>
           </a:solidFill>
           <a:ln>
             <a:noFill/>
@@ -15671,7 +15671,7 @@
             <a:r>
               <a:rPr sz="1950" b="1" spc="160">
                 <a:solidFill>
-                  <a:srgbClr val="2457D6"/>
+                  <a:srgbClr val="1E7F5B"/>
                 </a:solidFill>
                 <a:latin typeface="Pretendard"/>
                 <a:ea typeface="Pretendard"/>
@@ -15712,7 +15712,7 @@
             <a:r>
               <a:rPr sz="5100" b="1">
                 <a:solidFill>
-                  <a:srgbClr val="1E2A6E"/>
+                  <a:srgbClr val="1E3E69"/>
                 </a:solidFill>
                 <a:latin typeface="Pretendard"/>
                 <a:ea typeface="Pretendard"/>
@@ -15738,7 +15738,7 @@
             <a:avLst/>
           </a:prstGeom>
           <a:solidFill>
-            <a:srgbClr val="1E2A6E"/>
+            <a:srgbClr val="1E3E69"/>
           </a:solidFill>
           <a:ln>
             <a:noFill/>
@@ -15770,11 +15770,11 @@
             </a:avLst>
           </a:prstGeom>
           <a:solidFill>
-            <a:srgbClr val="F6F8FD"/>
+            <a:srgbClr val="F4F7FA"/>
           </a:solidFill>
           <a:ln w="9525">
             <a:solidFill>
-              <a:srgbClr val="DEE3F0"/>
+              <a:srgbClr val="D8E1EE"/>
             </a:solidFill>
           </a:ln>
           <a:effectLst/>
@@ -15802,7 +15802,7 @@
             <a:avLst/>
           </a:prstGeom>
           <a:solidFill>
-            <a:srgbClr val="1E2A6E"/>
+            <a:srgbClr val="1E3E69"/>
           </a:solidFill>
           <a:ln>
             <a:noFill/>
@@ -15888,7 +15888,7 @@
             <a:r>
               <a:rPr sz="2325" b="1">
                 <a:solidFill>
-                  <a:srgbClr val="1E2A6E"/>
+                  <a:srgbClr val="1E3E69"/>
                 </a:solidFill>
                 <a:latin typeface="Pretendard"/>
                 <a:ea typeface="Pretendard"/>
@@ -15916,11 +15916,11 @@
             </a:avLst>
           </a:prstGeom>
           <a:solidFill>
-            <a:srgbClr val="F6F8FD"/>
+            <a:srgbClr val="F4F7FA"/>
           </a:solidFill>
           <a:ln w="9525">
             <a:solidFill>
-              <a:srgbClr val="DEE3F0"/>
+              <a:srgbClr val="D8E1EE"/>
             </a:solidFill>
           </a:ln>
           <a:effectLst/>
@@ -15948,7 +15948,7 @@
             <a:avLst/>
           </a:prstGeom>
           <a:solidFill>
-            <a:srgbClr val="1E2A6E"/>
+            <a:srgbClr val="1E3E69"/>
           </a:solidFill>
           <a:ln>
             <a:noFill/>
@@ -16034,7 +16034,7 @@
             <a:r>
               <a:rPr sz="2325" b="1">
                 <a:solidFill>
-                  <a:srgbClr val="1E2A6E"/>
+                  <a:srgbClr val="1E3E69"/>
                 </a:solidFill>
                 <a:latin typeface="Pretendard"/>
                 <a:ea typeface="Pretendard"/>
@@ -16062,11 +16062,11 @@
             </a:avLst>
           </a:prstGeom>
           <a:solidFill>
-            <a:srgbClr val="F6F8FD"/>
+            <a:srgbClr val="F4F7FA"/>
           </a:solidFill>
           <a:ln w="9525">
             <a:solidFill>
-              <a:srgbClr val="DEE3F0"/>
+              <a:srgbClr val="D8E1EE"/>
             </a:solidFill>
           </a:ln>
           <a:effectLst/>
@@ -16094,7 +16094,7 @@
             <a:avLst/>
           </a:prstGeom>
           <a:solidFill>
-            <a:srgbClr val="1E2A6E"/>
+            <a:srgbClr val="1E3E69"/>
           </a:solidFill>
           <a:ln>
             <a:noFill/>
@@ -16180,7 +16180,7 @@
             <a:r>
               <a:rPr sz="2325" b="1">
                 <a:solidFill>
-                  <a:srgbClr val="1E2A6E"/>
+                  <a:srgbClr val="1E3E69"/>
                 </a:solidFill>
                 <a:latin typeface="Pretendard"/>
                 <a:ea typeface="Pretendard"/>
@@ -16208,11 +16208,11 @@
             </a:avLst>
           </a:prstGeom>
           <a:solidFill>
-            <a:srgbClr val="F6F8FD"/>
+            <a:srgbClr val="F4F7FA"/>
           </a:solidFill>
           <a:ln w="9525">
             <a:solidFill>
-              <a:srgbClr val="DEE3F0"/>
+              <a:srgbClr val="D8E1EE"/>
             </a:solidFill>
           </a:ln>
           <a:effectLst/>
@@ -16240,7 +16240,7 @@
             <a:avLst/>
           </a:prstGeom>
           <a:solidFill>
-            <a:srgbClr val="1E2A6E"/>
+            <a:srgbClr val="1E3E69"/>
           </a:solidFill>
           <a:ln>
             <a:noFill/>
@@ -16326,7 +16326,7 @@
             <a:r>
               <a:rPr sz="2325" b="1">
                 <a:solidFill>
-                  <a:srgbClr val="1E2A6E"/>
+                  <a:srgbClr val="1E3E69"/>
                 </a:solidFill>
                 <a:latin typeface="Pretendard"/>
                 <a:ea typeface="Pretendard"/>
@@ -16354,11 +16354,11 @@
             </a:avLst>
           </a:prstGeom>
           <a:solidFill>
-            <a:srgbClr val="EAF0FF"/>
+            <a:srgbClr val="E6F4EE"/>
           </a:solidFill>
           <a:ln w="9525">
             <a:solidFill>
-              <a:srgbClr val="C9D7FF"/>
+              <a:srgbClr val="C3E6D8"/>
             </a:solidFill>
           </a:ln>
           <a:effectLst/>
@@ -16401,7 +16401,7 @@
             <a:r>
               <a:rPr sz="2475" b="1">
                 <a:solidFill>
-                  <a:srgbClr val="1E2A6E"/>
+                  <a:srgbClr val="1E3E69"/>
                 </a:solidFill>
                 <a:latin typeface="Pretendard"/>
                 <a:ea typeface="Pretendard"/>
@@ -16427,7 +16427,7 @@
             <a:avLst/>
           </a:prstGeom>
           <a:solidFill>
-            <a:srgbClr val="DEE3F0"/>
+            <a:srgbClr val="D8E1EE"/>
           </a:solidFill>
           <a:ln>
             <a:noFill/>
@@ -16557,7 +16557,7 @@
             <a:avLst/>
           </a:prstGeom>
           <a:solidFill>
-            <a:srgbClr val="F4F6FC"/>
+            <a:srgbClr val="F3F8F6"/>
           </a:solidFill>
           <a:ln>
             <a:noFill/>
@@ -16587,7 +16587,7 @@
             <a:avLst/>
           </a:prstGeom>
           <a:solidFill>
-            <a:srgbClr val="F6F6F9"/>
+            <a:srgbClr val="F6F7F9"/>
           </a:solidFill>
           <a:ln>
             <a:noFill/>
@@ -16617,7 +16617,7 @@
             <a:avLst/>
           </a:prstGeom>
           <a:solidFill>
-            <a:srgbClr val="1E2A6E"/>
+            <a:srgbClr val="1E3E69"/>
           </a:solidFill>
           <a:ln>
             <a:noFill/>
@@ -16662,7 +16662,7 @@
             <a:r>
               <a:rPr sz="2400" b="1">
                 <a:solidFill>
-                  <a:srgbClr val="2457D6"/>
+                  <a:srgbClr val="1E7F5B"/>
                 </a:solidFill>
                 <a:latin typeface="Pretendard"/>
                 <a:ea typeface="Pretendard"/>
@@ -16703,7 +16703,7 @@
             <a:r>
               <a:rPr sz="5100" b="1">
                 <a:solidFill>
-                  <a:srgbClr val="1E2A6E"/>
+                  <a:srgbClr val="1E3E69"/>
                 </a:solidFill>
                 <a:latin typeface="Pretendard"/>
                 <a:ea typeface="Pretendard"/>
@@ -16772,11 +16772,11 @@
             </a:avLst>
           </a:prstGeom>
           <a:solidFill>
-            <a:srgbClr val="F6F8FD"/>
+            <a:srgbClr val="F4F7FA"/>
           </a:solidFill>
           <a:ln w="9525">
             <a:solidFill>
-              <a:srgbClr val="DEE3F0"/>
+              <a:srgbClr val="D8E1EE"/>
             </a:solidFill>
           </a:ln>
           <a:effectLst/>
@@ -16819,7 +16819,7 @@
             <a:r>
               <a:rPr sz="2475" b="1">
                 <a:solidFill>
-                  <a:srgbClr val="2457D6"/>
+                  <a:srgbClr val="1E7F5B"/>
                 </a:solidFill>
                 <a:latin typeface="Pretendard"/>
                 <a:ea typeface="Pretendard"/>
@@ -16860,7 +16860,7 @@
             <a:r>
               <a:rPr sz="2475" b="1">
                 <a:solidFill>
-                  <a:srgbClr val="1E2A6E"/>
+                  <a:srgbClr val="1E3E69"/>
                 </a:solidFill>
                 <a:latin typeface="Pretendard"/>
                 <a:ea typeface="Pretendard"/>
@@ -16888,11 +16888,11 @@
             </a:avLst>
           </a:prstGeom>
           <a:solidFill>
-            <a:srgbClr val="F6F8FD"/>
+            <a:srgbClr val="F4F7FA"/>
           </a:solidFill>
           <a:ln w="9525">
             <a:solidFill>
-              <a:srgbClr val="DEE3F0"/>
+              <a:srgbClr val="D8E1EE"/>
             </a:solidFill>
           </a:ln>
           <a:effectLst/>
@@ -16935,7 +16935,7 @@
             <a:r>
               <a:rPr sz="2475" b="1">
                 <a:solidFill>
-                  <a:srgbClr val="2457D6"/>
+                  <a:srgbClr val="1E7F5B"/>
                 </a:solidFill>
                 <a:latin typeface="Pretendard"/>
                 <a:ea typeface="Pretendard"/>
@@ -16976,7 +16976,7 @@
             <a:r>
               <a:rPr sz="2475" b="1">
                 <a:solidFill>
-                  <a:srgbClr val="1E2A6E"/>
+                  <a:srgbClr val="1E3E69"/>
                 </a:solidFill>
                 <a:latin typeface="Pretendard"/>
                 <a:ea typeface="Pretendard"/>
@@ -17004,11 +17004,11 @@
             </a:avLst>
           </a:prstGeom>
           <a:solidFill>
-            <a:srgbClr val="F6F8FD"/>
+            <a:srgbClr val="F4F7FA"/>
           </a:solidFill>
           <a:ln w="9525">
             <a:solidFill>
-              <a:srgbClr val="DEE3F0"/>
+              <a:srgbClr val="D8E1EE"/>
             </a:solidFill>
           </a:ln>
           <a:effectLst/>
@@ -17051,7 +17051,7 @@
             <a:r>
               <a:rPr sz="2475" b="1">
                 <a:solidFill>
-                  <a:srgbClr val="2457D6"/>
+                  <a:srgbClr val="1E7F5B"/>
                 </a:solidFill>
                 <a:latin typeface="Pretendard"/>
                 <a:ea typeface="Pretendard"/>
@@ -17092,7 +17092,7 @@
             <a:r>
               <a:rPr sz="2475" b="1">
                 <a:solidFill>
-                  <a:srgbClr val="1E2A6E"/>
+                  <a:srgbClr val="1E3E69"/>
                 </a:solidFill>
                 <a:latin typeface="Pretendard"/>
                 <a:ea typeface="Pretendard"/>
@@ -17120,11 +17120,11 @@
             </a:avLst>
           </a:prstGeom>
           <a:solidFill>
-            <a:srgbClr val="F6F8FD"/>
+            <a:srgbClr val="F4F7FA"/>
           </a:solidFill>
           <a:ln w="9525">
             <a:solidFill>
-              <a:srgbClr val="DEE3F0"/>
+              <a:srgbClr val="D8E1EE"/>
             </a:solidFill>
           </a:ln>
           <a:effectLst/>
@@ -17167,7 +17167,7 @@
             <a:r>
               <a:rPr sz="2475" b="1">
                 <a:solidFill>
-                  <a:srgbClr val="2457D6"/>
+                  <a:srgbClr val="1E7F5B"/>
                 </a:solidFill>
                 <a:latin typeface="Pretendard"/>
                 <a:ea typeface="Pretendard"/>
@@ -17208,7 +17208,7 @@
             <a:r>
               <a:rPr sz="2250" b="1">
                 <a:solidFill>
-                  <a:srgbClr val="1E2A6E"/>
+                  <a:srgbClr val="1E3E69"/>
                 </a:solidFill>
                 <a:latin typeface="Pretendard"/>
                 <a:ea typeface="Pretendard"/>
@@ -17234,7 +17234,7 @@
             <a:avLst/>
           </a:prstGeom>
           <a:solidFill>
-            <a:srgbClr val="2457D6"/>
+            <a:srgbClr val="1E7F5B"/>
           </a:solidFill>
           <a:ln>
             <a:noFill/>
@@ -17279,7 +17279,7 @@
             <a:r>
               <a:rPr sz="1800" b="1" spc="140">
                 <a:solidFill>
-                  <a:srgbClr val="2457D6"/>
+                  <a:srgbClr val="1E7F5B"/>
                 </a:solidFill>
                 <a:latin typeface="Pretendard"/>
                 <a:ea typeface="Pretendard"/>
@@ -17320,7 +17320,7 @@
             <a:r>
               <a:rPr sz="2400" b="1">
                 <a:solidFill>
-                  <a:srgbClr val="1E2A6E"/>
+                  <a:srgbClr val="1E3E69"/>
                 </a:solidFill>
                 <a:latin typeface="Pretendard"/>
                 <a:ea typeface="Pretendard"/>
@@ -17364,7 +17364,7 @@
             <a:avLst/>
           </a:prstGeom>
           <a:solidFill>
-            <a:srgbClr val="F4F6FC"/>
+            <a:srgbClr val="F3F8F6"/>
           </a:solidFill>
           <a:ln>
             <a:noFill/>
@@ -17424,7 +17424,7 @@
             <a:avLst/>
           </a:prstGeom>
           <a:solidFill>
-            <a:srgbClr val="F8F8FA"/>
+            <a:srgbClr val="F8F9FA"/>
           </a:solidFill>
           <a:ln>
             <a:noFill/>
@@ -17469,7 +17469,7 @@
             <a:r>
               <a:rPr sz="1950" b="1" spc="160">
                 <a:solidFill>
-                  <a:srgbClr val="2457D6"/>
+                  <a:srgbClr val="1E7F5B"/>
                 </a:solidFill>
                 <a:latin typeface="Pretendard"/>
                 <a:ea typeface="Pretendard"/>
@@ -17510,7 +17510,7 @@
             <a:r>
               <a:rPr sz="5100" b="1">
                 <a:solidFill>
-                  <a:srgbClr val="1E2A6E"/>
+                  <a:srgbClr val="1E3E69"/>
                 </a:solidFill>
                 <a:latin typeface="Pretendard"/>
                 <a:ea typeface="Pretendard"/>
@@ -17536,7 +17536,7 @@
             <a:avLst/>
           </a:prstGeom>
           <a:solidFill>
-            <a:srgbClr val="1E2A6E"/>
+            <a:srgbClr val="1E3E69"/>
           </a:solidFill>
           <a:ln>
             <a:noFill/>
@@ -17566,7 +17566,7 @@
             <a:avLst/>
           </a:prstGeom>
           <a:solidFill>
-            <a:srgbClr val="C9D7FF"/>
+            <a:srgbClr val="C3E6D8"/>
           </a:solidFill>
           <a:ln>
             <a:noFill/>
@@ -17611,7 +17611,7 @@
             <a:r>
               <a:rPr sz="1950" b="1">
                 <a:solidFill>
-                  <a:srgbClr val="2457D6"/>
+                  <a:srgbClr val="1E7F5B"/>
                 </a:solidFill>
                 <a:latin typeface="Pretendard"/>
                 <a:ea typeface="Pretendard"/>
@@ -17637,7 +17637,7 @@
             <a:avLst/>
           </a:prstGeom>
           <a:solidFill>
-            <a:srgbClr val="2457D6"/>
+            <a:srgbClr val="1E7F5B"/>
           </a:solidFill>
           <a:ln>
             <a:noFill/>
@@ -17669,11 +17669,11 @@
             </a:avLst>
           </a:prstGeom>
           <a:solidFill>
-            <a:srgbClr val="F6F8FD"/>
+            <a:srgbClr val="F4F7FA"/>
           </a:solidFill>
           <a:ln w="9525">
             <a:solidFill>
-              <a:srgbClr val="DEE3F0"/>
+              <a:srgbClr val="D8E1EE"/>
             </a:solidFill>
           </a:ln>
           <a:effectLst/>
@@ -17716,7 +17716,7 @@
             <a:r>
               <a:rPr sz="2250" b="1">
                 <a:solidFill>
-                  <a:srgbClr val="1E2A6E"/>
+                  <a:srgbClr val="1E3E69"/>
                 </a:solidFill>
                 <a:latin typeface="Pretendard"/>
                 <a:ea typeface="Pretendard"/>
@@ -17742,7 +17742,7 @@
             <a:avLst/>
           </a:prstGeom>
           <a:solidFill>
-            <a:srgbClr val="DEE3F0"/>
+            <a:srgbClr val="D8E1EE"/>
           </a:solidFill>
           <a:ln>
             <a:noFill/>
@@ -17787,7 +17787,7 @@
             <a:r>
               <a:rPr sz="1500" b="1" spc="120">
                 <a:solidFill>
-                  <a:srgbClr val="2457D6"/>
+                  <a:srgbClr val="1E7F5B"/>
                 </a:solidFill>
                 <a:latin typeface="Pretendard"/>
                 <a:ea typeface="Pretendard"/>
@@ -17869,7 +17869,7 @@
             <a:r>
               <a:rPr sz="1950" b="1">
                 <a:solidFill>
-                  <a:srgbClr val="1E2A6E"/>
+                  <a:srgbClr val="1E3E69"/>
                 </a:solidFill>
                 <a:latin typeface="Pretendard"/>
                 <a:ea typeface="Pretendard"/>
@@ -17895,7 +17895,7 @@
             <a:avLst/>
           </a:prstGeom>
           <a:solidFill>
-            <a:srgbClr val="1E2A6E"/>
+            <a:srgbClr val="1E3E69"/>
           </a:solidFill>
           <a:ln>
             <a:noFill/>
@@ -17927,11 +17927,11 @@
             </a:avLst>
           </a:prstGeom>
           <a:solidFill>
-            <a:srgbClr val="EAF0FF"/>
+            <a:srgbClr val="E6F4EE"/>
           </a:solidFill>
           <a:ln w="19050">
             <a:solidFill>
-              <a:srgbClr val="1E2A6E"/>
+              <a:srgbClr val="1E3E69"/>
             </a:solidFill>
           </a:ln>
           <a:effectLst/>
@@ -17974,7 +17974,7 @@
             <a:r>
               <a:rPr sz="2250" b="1">
                 <a:solidFill>
-                  <a:srgbClr val="1E2A6E"/>
+                  <a:srgbClr val="1E3E69"/>
                 </a:solidFill>
                 <a:latin typeface="Pretendard"/>
                 <a:ea typeface="Pretendard"/>
@@ -18000,7 +18000,7 @@
             <a:avLst/>
           </a:prstGeom>
           <a:solidFill>
-            <a:srgbClr val="DEE3F0"/>
+            <a:srgbClr val="D8E1EE"/>
           </a:solidFill>
           <a:ln>
             <a:noFill/>
@@ -18045,7 +18045,7 @@
             <a:r>
               <a:rPr sz="1500" b="1" spc="120">
                 <a:solidFill>
-                  <a:srgbClr val="2457D6"/>
+                  <a:srgbClr val="1E7F5B"/>
                 </a:solidFill>
                 <a:latin typeface="Pretendard"/>
                 <a:ea typeface="Pretendard"/>
@@ -18127,7 +18127,7 @@
             <a:r>
               <a:rPr sz="1950" b="1">
                 <a:solidFill>
-                  <a:srgbClr val="2457D6"/>
+                  <a:srgbClr val="1E7F5B"/>
                 </a:solidFill>
                 <a:latin typeface="Pretendard"/>
                 <a:ea typeface="Pretendard"/>
@@ -18153,7 +18153,7 @@
             <a:avLst/>
           </a:prstGeom>
           <a:solidFill>
-            <a:srgbClr val="2457D6"/>
+            <a:srgbClr val="1E7F5B"/>
           </a:solidFill>
           <a:ln>
             <a:noFill/>
@@ -18185,11 +18185,11 @@
             </a:avLst>
           </a:prstGeom>
           <a:solidFill>
-            <a:srgbClr val="F6F8FD"/>
+            <a:srgbClr val="F4F7FA"/>
           </a:solidFill>
           <a:ln w="9525">
             <a:solidFill>
-              <a:srgbClr val="DEE3F0"/>
+              <a:srgbClr val="D8E1EE"/>
             </a:solidFill>
           </a:ln>
           <a:effectLst/>
@@ -18232,7 +18232,7 @@
             <a:r>
               <a:rPr sz="2250" b="1">
                 <a:solidFill>
-                  <a:srgbClr val="1E2A6E"/>
+                  <a:srgbClr val="1E3E69"/>
                 </a:solidFill>
                 <a:latin typeface="Pretendard"/>
                 <a:ea typeface="Pretendard"/>
@@ -18258,7 +18258,7 @@
             <a:avLst/>
           </a:prstGeom>
           <a:solidFill>
-            <a:srgbClr val="DEE3F0"/>
+            <a:srgbClr val="D8E1EE"/>
           </a:solidFill>
           <a:ln>
             <a:noFill/>
@@ -18303,7 +18303,7 @@
             <a:r>
               <a:rPr sz="1500" b="1" spc="120">
                 <a:solidFill>
-                  <a:srgbClr val="2457D6"/>
+                  <a:srgbClr val="1E7F5B"/>
                 </a:solidFill>
                 <a:latin typeface="Pretendard"/>
                 <a:ea typeface="Pretendard"/>
@@ -18385,7 +18385,7 @@
             <a:r>
               <a:rPr sz="1950" b="1">
                 <a:solidFill>
-                  <a:srgbClr val="2457D6"/>
+                  <a:srgbClr val="1E7F5B"/>
                 </a:solidFill>
                 <a:latin typeface="Pretendard"/>
                 <a:ea typeface="Pretendard"/>
@@ -18411,7 +18411,7 @@
             <a:avLst/>
           </a:prstGeom>
           <a:solidFill>
-            <a:srgbClr val="2457D6"/>
+            <a:srgbClr val="1E7F5B"/>
           </a:solidFill>
           <a:ln>
             <a:noFill/>
@@ -18443,11 +18443,11 @@
             </a:avLst>
           </a:prstGeom>
           <a:solidFill>
-            <a:srgbClr val="F6F8FD"/>
+            <a:srgbClr val="F4F7FA"/>
           </a:solidFill>
           <a:ln w="9525">
             <a:solidFill>
-              <a:srgbClr val="DEE3F0"/>
+              <a:srgbClr val="D8E1EE"/>
             </a:solidFill>
           </a:ln>
           <a:effectLst/>
@@ -18490,7 +18490,7 @@
             <a:r>
               <a:rPr sz="2250" b="1">
                 <a:solidFill>
-                  <a:srgbClr val="1E2A6E"/>
+                  <a:srgbClr val="1E3E69"/>
                 </a:solidFill>
                 <a:latin typeface="Pretendard"/>
                 <a:ea typeface="Pretendard"/>
@@ -18516,7 +18516,7 @@
             <a:avLst/>
           </a:prstGeom>
           <a:solidFill>
-            <a:srgbClr val="DEE3F0"/>
+            <a:srgbClr val="D8E1EE"/>
           </a:solidFill>
           <a:ln>
             <a:noFill/>
@@ -18561,7 +18561,7 @@
             <a:r>
               <a:rPr sz="1500" b="1" spc="120">
                 <a:solidFill>
-                  <a:srgbClr val="2457D6"/>
+                  <a:srgbClr val="1E7F5B"/>
                 </a:solidFill>
                 <a:latin typeface="Pretendard"/>
                 <a:ea typeface="Pretendard"/>
@@ -18628,7 +18628,7 @@
             <a:avLst/>
           </a:prstGeom>
           <a:solidFill>
-            <a:srgbClr val="C9D7FF"/>
+            <a:srgbClr val="C3E6D8"/>
           </a:solidFill>
           <a:ln>
             <a:noFill/>
@@ -18699,7 +18699,7 @@
             <a:avLst/>
           </a:prstGeom>
           <a:solidFill>
-            <a:srgbClr val="DEE3F0"/>
+            <a:srgbClr val="D8E1EE"/>
           </a:solidFill>
           <a:ln>
             <a:noFill/>
@@ -18829,7 +18829,7 @@
             <a:avLst/>
           </a:prstGeom>
           <a:solidFill>
-            <a:srgbClr val="F4F6FC"/>
+            <a:srgbClr val="F3F8F6"/>
           </a:solidFill>
           <a:ln>
             <a:noFill/>
@@ -18859,7 +18859,7 @@
             <a:avLst/>
           </a:prstGeom>
           <a:solidFill>
-            <a:srgbClr val="F6F6F9"/>
+            <a:srgbClr val="F6F7F9"/>
           </a:solidFill>
           <a:ln>
             <a:noFill/>
@@ -18889,7 +18889,7 @@
             <a:avLst/>
           </a:prstGeom>
           <a:solidFill>
-            <a:srgbClr val="1E2A6E"/>
+            <a:srgbClr val="1E3E69"/>
           </a:solidFill>
           <a:ln>
             <a:noFill/>
@@ -18934,7 +18934,7 @@
             <a:r>
               <a:rPr sz="2400" b="1">
                 <a:solidFill>
-                  <a:srgbClr val="2457D6"/>
+                  <a:srgbClr val="1E7F5B"/>
                 </a:solidFill>
                 <a:latin typeface="Pretendard"/>
                 <a:ea typeface="Pretendard"/>
@@ -18975,7 +18975,7 @@
             <a:r>
               <a:rPr sz="6600" b="1">
                 <a:solidFill>
-                  <a:srgbClr val="1E2A6E"/>
+                  <a:srgbClr val="1E3E69"/>
                 </a:solidFill>
                 <a:latin typeface="Pretendard"/>
                 <a:ea typeface="Pretendard"/>
@@ -19042,7 +19042,7 @@
             <a:avLst/>
           </a:prstGeom>
           <a:solidFill>
-            <a:srgbClr val="DEE3F0"/>
+            <a:srgbClr val="D8E1EE"/>
           </a:solidFill>
           <a:ln>
             <a:noFill/>
@@ -19172,7 +19172,7 @@
             <a:avLst/>
           </a:prstGeom>
           <a:solidFill>
-            <a:srgbClr val="F4F6FC"/>
+            <a:srgbClr val="F3F8F6"/>
           </a:solidFill>
           <a:ln>
             <a:noFill/>
@@ -19232,7 +19232,7 @@
             <a:avLst/>
           </a:prstGeom>
           <a:solidFill>
-            <a:srgbClr val="F8F8FA"/>
+            <a:srgbClr val="F8F9FA"/>
           </a:solidFill>
           <a:ln>
             <a:noFill/>
@@ -19277,7 +19277,7 @@
             <a:r>
               <a:rPr sz="1950" b="1" spc="160">
                 <a:solidFill>
-                  <a:srgbClr val="2457D6"/>
+                  <a:srgbClr val="1E7F5B"/>
                 </a:solidFill>
                 <a:latin typeface="Pretendard"/>
                 <a:ea typeface="Pretendard"/>
@@ -19318,7 +19318,7 @@
             <a:r>
               <a:rPr sz="5100" b="1">
                 <a:solidFill>
-                  <a:srgbClr val="1E2A6E"/>
+                  <a:srgbClr val="1E3E69"/>
                 </a:solidFill>
                 <a:latin typeface="Pretendard"/>
                 <a:ea typeface="Pretendard"/>
@@ -19344,7 +19344,7 @@
             <a:avLst/>
           </a:prstGeom>
           <a:solidFill>
-            <a:srgbClr val="1E2A6E"/>
+            <a:srgbClr val="1E3E69"/>
           </a:solidFill>
           <a:ln>
             <a:noFill/>
@@ -19417,11 +19417,11 @@
             </a:avLst>
           </a:prstGeom>
           <a:solidFill>
-            <a:srgbClr val="F6F8FD"/>
+            <a:srgbClr val="F4F7FA"/>
           </a:solidFill>
           <a:ln w="9525">
             <a:solidFill>
-              <a:srgbClr val="DEE3F0"/>
+              <a:srgbClr val="D8E1EE"/>
             </a:solidFill>
           </a:ln>
           <a:effectLst/>
@@ -19449,7 +19449,7 @@
             <a:avLst/>
           </a:prstGeom>
           <a:solidFill>
-            <a:srgbClr val="1E2A6E"/>
+            <a:srgbClr val="1E3E69"/>
           </a:solidFill>
           <a:ln>
             <a:noFill/>
@@ -19581,11 +19581,11 @@
             </a:avLst>
           </a:prstGeom>
           <a:solidFill>
-            <a:srgbClr val="F6F8FD"/>
+            <a:srgbClr val="F4F7FA"/>
           </a:solidFill>
           <a:ln w="9525">
             <a:solidFill>
-              <a:srgbClr val="DEE3F0"/>
+              <a:srgbClr val="D8E1EE"/>
             </a:solidFill>
           </a:ln>
           <a:effectLst/>
@@ -19613,7 +19613,7 @@
             <a:avLst/>
           </a:prstGeom>
           <a:solidFill>
-            <a:srgbClr val="2457D6"/>
+            <a:srgbClr val="1E7F5B"/>
           </a:solidFill>
           <a:ln>
             <a:noFill/>
@@ -19745,11 +19745,11 @@
             </a:avLst>
           </a:prstGeom>
           <a:solidFill>
-            <a:srgbClr val="F6F8FD"/>
+            <a:srgbClr val="F4F7FA"/>
           </a:solidFill>
           <a:ln w="9525">
             <a:solidFill>
-              <a:srgbClr val="DEE3F0"/>
+              <a:srgbClr val="D8E1EE"/>
             </a:solidFill>
           </a:ln>
           <a:effectLst/>
@@ -19777,7 +19777,7 @@
             <a:avLst/>
           </a:prstGeom>
           <a:solidFill>
-            <a:srgbClr val="1E2A6E"/>
+            <a:srgbClr val="1E3E69"/>
           </a:solidFill>
           <a:ln>
             <a:noFill/>
@@ -19909,11 +19909,11 @@
             </a:avLst>
           </a:prstGeom>
           <a:solidFill>
-            <a:srgbClr val="F6F8FD"/>
+            <a:srgbClr val="F4F7FA"/>
           </a:solidFill>
           <a:ln w="9525">
             <a:solidFill>
-              <a:srgbClr val="DEE3F0"/>
+              <a:srgbClr val="D8E1EE"/>
             </a:solidFill>
           </a:ln>
           <a:effectLst/>
@@ -19941,7 +19941,7 @@
             <a:avLst/>
           </a:prstGeom>
           <a:solidFill>
-            <a:srgbClr val="2457D6"/>
+            <a:srgbClr val="1E7F5B"/>
           </a:solidFill>
           <a:ln>
             <a:noFill/>
@@ -20073,11 +20073,11 @@
             </a:avLst>
           </a:prstGeom>
           <a:solidFill>
-            <a:srgbClr val="F6F8FD"/>
+            <a:srgbClr val="F4F7FA"/>
           </a:solidFill>
           <a:ln w="9525">
             <a:solidFill>
-              <a:srgbClr val="DEE3F0"/>
+              <a:srgbClr val="D8E1EE"/>
             </a:solidFill>
           </a:ln>
           <a:effectLst/>
@@ -20105,7 +20105,7 @@
             <a:avLst/>
           </a:prstGeom>
           <a:solidFill>
-            <a:srgbClr val="1E2A6E"/>
+            <a:srgbClr val="1E3E69"/>
           </a:solidFill>
           <a:ln>
             <a:noFill/>
@@ -20235,7 +20235,7 @@
             <a:avLst/>
           </a:prstGeom>
           <a:solidFill>
-            <a:srgbClr val="DEE3F0"/>
+            <a:srgbClr val="D8E1EE"/>
           </a:solidFill>
           <a:ln>
             <a:noFill/>
@@ -20365,7 +20365,7 @@
             <a:avLst/>
           </a:prstGeom>
           <a:solidFill>
-            <a:srgbClr val="F4F6FC"/>
+            <a:srgbClr val="F3F8F6"/>
           </a:solidFill>
           <a:ln>
             <a:noFill/>
@@ -20425,7 +20425,7 @@
             <a:avLst/>
           </a:prstGeom>
           <a:solidFill>
-            <a:srgbClr val="F8F8FA"/>
+            <a:srgbClr val="F8F9FA"/>
           </a:solidFill>
           <a:ln>
             <a:noFill/>
@@ -20470,7 +20470,7 @@
             <a:r>
               <a:rPr sz="1950" b="1" spc="160">
                 <a:solidFill>
-                  <a:srgbClr val="2457D6"/>
+                  <a:srgbClr val="1E7F5B"/>
                 </a:solidFill>
                 <a:latin typeface="Pretendard"/>
                 <a:ea typeface="Pretendard"/>
@@ -20511,7 +20511,7 @@
             <a:r>
               <a:rPr sz="5100" b="1">
                 <a:solidFill>
-                  <a:srgbClr val="1E2A6E"/>
+                  <a:srgbClr val="1E3E69"/>
                 </a:solidFill>
                 <a:latin typeface="Pretendard"/>
                 <a:ea typeface="Pretendard"/>
@@ -20537,7 +20537,7 @@
             <a:avLst/>
           </a:prstGeom>
           <a:solidFill>
-            <a:srgbClr val="1E2A6E"/>
+            <a:srgbClr val="1E3E69"/>
           </a:solidFill>
           <a:ln>
             <a:noFill/>
@@ -20569,11 +20569,11 @@
             </a:avLst>
           </a:prstGeom>
           <a:solidFill>
-            <a:srgbClr val="F6F8FD"/>
+            <a:srgbClr val="F4F7FA"/>
           </a:solidFill>
           <a:ln w="9525">
             <a:solidFill>
-              <a:srgbClr val="DEE3F0"/>
+              <a:srgbClr val="D8E1EE"/>
             </a:solidFill>
           </a:ln>
           <a:effectLst/>
@@ -20601,7 +20601,7 @@
             <a:avLst/>
           </a:prstGeom>
           <a:solidFill>
-            <a:srgbClr val="2457D6"/>
+            <a:srgbClr val="1E7F5B"/>
           </a:solidFill>
           <a:ln>
             <a:noFill/>
@@ -20687,7 +20687,7 @@
             <a:r>
               <a:rPr sz="3150" b="1">
                 <a:solidFill>
-                  <a:srgbClr val="1E2A6E"/>
+                  <a:srgbClr val="1E3E69"/>
                 </a:solidFill>
                 <a:latin typeface="Pretendard"/>
                 <a:ea typeface="Pretendard"/>
@@ -20754,11 +20754,11 @@
             </a:avLst>
           </a:prstGeom>
           <a:solidFill>
-            <a:srgbClr val="F6F8FD"/>
+            <a:srgbClr val="F4F7FA"/>
           </a:solidFill>
           <a:ln w="9525">
             <a:solidFill>
-              <a:srgbClr val="DEE3F0"/>
+              <a:srgbClr val="D8E1EE"/>
             </a:solidFill>
           </a:ln>
           <a:effectLst/>
@@ -20786,7 +20786,7 @@
             <a:avLst/>
           </a:prstGeom>
           <a:solidFill>
-            <a:srgbClr val="2457D6"/>
+            <a:srgbClr val="1E7F5B"/>
           </a:solidFill>
           <a:ln>
             <a:noFill/>
@@ -20872,7 +20872,7 @@
             <a:r>
               <a:rPr sz="3150" b="1">
                 <a:solidFill>
-                  <a:srgbClr val="1E2A6E"/>
+                  <a:srgbClr val="1E3E69"/>
                 </a:solidFill>
                 <a:latin typeface="Pretendard"/>
                 <a:ea typeface="Pretendard"/>
@@ -20939,11 +20939,11 @@
             </a:avLst>
           </a:prstGeom>
           <a:solidFill>
-            <a:srgbClr val="F6F8FD"/>
+            <a:srgbClr val="F4F7FA"/>
           </a:solidFill>
           <a:ln w="9525">
             <a:solidFill>
-              <a:srgbClr val="DEE3F0"/>
+              <a:srgbClr val="D8E1EE"/>
             </a:solidFill>
           </a:ln>
           <a:effectLst/>
@@ -20971,7 +20971,7 @@
             <a:avLst/>
           </a:prstGeom>
           <a:solidFill>
-            <a:srgbClr val="2457D6"/>
+            <a:srgbClr val="1E7F5B"/>
           </a:solidFill>
           <a:ln>
             <a:noFill/>
@@ -21057,7 +21057,7 @@
             <a:r>
               <a:rPr sz="3150" b="1">
                 <a:solidFill>
-                  <a:srgbClr val="1E2A6E"/>
+                  <a:srgbClr val="1E3E69"/>
                 </a:solidFill>
                 <a:latin typeface="Pretendard"/>
                 <a:ea typeface="Pretendard"/>
@@ -21122,7 +21122,7 @@
             <a:avLst/>
           </a:prstGeom>
           <a:solidFill>
-            <a:srgbClr val="DEE3F0"/>
+            <a:srgbClr val="D8E1EE"/>
           </a:solidFill>
           <a:ln>
             <a:noFill/>
@@ -21252,7 +21252,7 @@
             <a:avLst/>
           </a:prstGeom>
           <a:solidFill>
-            <a:srgbClr val="F4F6FC"/>
+            <a:srgbClr val="F3F8F6"/>
           </a:solidFill>
           <a:ln>
             <a:noFill/>
@@ -21312,7 +21312,7 @@
             <a:avLst/>
           </a:prstGeom>
           <a:solidFill>
-            <a:srgbClr val="F8F8FA"/>
+            <a:srgbClr val="F8F9FA"/>
           </a:solidFill>
           <a:ln>
             <a:noFill/>
@@ -21357,7 +21357,7 @@
             <a:r>
               <a:rPr sz="1950" b="1" spc="160">
                 <a:solidFill>
-                  <a:srgbClr val="2457D6"/>
+                  <a:srgbClr val="1E7F5B"/>
                 </a:solidFill>
                 <a:latin typeface="Pretendard"/>
                 <a:ea typeface="Pretendard"/>
@@ -21398,7 +21398,7 @@
             <a:r>
               <a:rPr sz="5100" b="1">
                 <a:solidFill>
-                  <a:srgbClr val="1E2A6E"/>
+                  <a:srgbClr val="1E3E69"/>
                 </a:solidFill>
                 <a:latin typeface="Pretendard"/>
                 <a:ea typeface="Pretendard"/>
@@ -21424,7 +21424,7 @@
             <a:avLst/>
           </a:prstGeom>
           <a:solidFill>
-            <a:srgbClr val="1E2A6E"/>
+            <a:srgbClr val="1E3E69"/>
           </a:solidFill>
           <a:ln>
             <a:noFill/>
@@ -21454,7 +21454,7 @@
             <a:avLst/>
           </a:prstGeom>
           <a:solidFill>
-            <a:srgbClr val="1E2A6E"/>
+            <a:srgbClr val="1E3E69"/>
           </a:solidFill>
           <a:ln>
             <a:noFill/>
@@ -21525,7 +21525,7 @@
             <a:avLst/>
           </a:prstGeom>
           <a:solidFill>
-            <a:srgbClr val="2457D6"/>
+            <a:srgbClr val="1E7F5B"/>
           </a:solidFill>
           <a:ln>
             <a:noFill/>
@@ -21598,11 +21598,11 @@
             </a:avLst>
           </a:prstGeom>
           <a:solidFill>
-            <a:srgbClr val="EAF0FF"/>
+            <a:srgbClr val="E6F4EE"/>
           </a:solidFill>
           <a:ln w="9525">
             <a:solidFill>
-              <a:srgbClr val="C9D7FF"/>
+              <a:srgbClr val="C3E6D8"/>
             </a:solidFill>
           </a:ln>
           <a:effectLst/>
@@ -21645,7 +21645,7 @@
             <a:r>
               <a:rPr sz="1875" b="1">
                 <a:solidFill>
-                  <a:srgbClr val="1E2A6E"/>
+                  <a:srgbClr val="1E3E69"/>
                 </a:solidFill>
                 <a:latin typeface="Pretendard"/>
                 <a:ea typeface="Pretendard"/>
@@ -21673,11 +21673,11 @@
             </a:avLst>
           </a:prstGeom>
           <a:solidFill>
-            <a:srgbClr val="F6F8FD"/>
+            <a:srgbClr val="F4F7FA"/>
           </a:solidFill>
           <a:ln w="9525">
             <a:solidFill>
-              <a:srgbClr val="DEE3F0"/>
+              <a:srgbClr val="D8E1EE"/>
             </a:solidFill>
           </a:ln>
           <a:effectLst/>
@@ -21748,11 +21748,11 @@
             </a:avLst>
           </a:prstGeom>
           <a:solidFill>
-            <a:srgbClr val="EAF0FF"/>
+            <a:srgbClr val="E6F4EE"/>
           </a:solidFill>
           <a:ln w="9525">
             <a:solidFill>
-              <a:srgbClr val="C9D7FF"/>
+              <a:srgbClr val="C3E6D8"/>
             </a:solidFill>
           </a:ln>
           <a:effectLst/>
@@ -21795,7 +21795,7 @@
             <a:r>
               <a:rPr sz="1875" b="1">
                 <a:solidFill>
-                  <a:srgbClr val="1E2A6E"/>
+                  <a:srgbClr val="1E3E69"/>
                 </a:solidFill>
                 <a:latin typeface="Pretendard"/>
                 <a:ea typeface="Pretendard"/>
@@ -21823,11 +21823,11 @@
             </a:avLst>
           </a:prstGeom>
           <a:solidFill>
-            <a:srgbClr val="F6F8FD"/>
+            <a:srgbClr val="F4F7FA"/>
           </a:solidFill>
           <a:ln w="9525">
             <a:solidFill>
-              <a:srgbClr val="DEE3F0"/>
+              <a:srgbClr val="D8E1EE"/>
             </a:solidFill>
           </a:ln>
           <a:effectLst/>
@@ -21898,11 +21898,11 @@
             </a:avLst>
           </a:prstGeom>
           <a:solidFill>
-            <a:srgbClr val="EAF0FF"/>
+            <a:srgbClr val="E6F4EE"/>
           </a:solidFill>
           <a:ln w="9525">
             <a:solidFill>
-              <a:srgbClr val="C9D7FF"/>
+              <a:srgbClr val="C3E6D8"/>
             </a:solidFill>
           </a:ln>
           <a:effectLst/>
@@ -21945,7 +21945,7 @@
             <a:r>
               <a:rPr sz="1875" b="1">
                 <a:solidFill>
-                  <a:srgbClr val="1E2A6E"/>
+                  <a:srgbClr val="1E3E69"/>
                 </a:solidFill>
                 <a:latin typeface="Pretendard"/>
                 <a:ea typeface="Pretendard"/>
@@ -21973,11 +21973,11 @@
             </a:avLst>
           </a:prstGeom>
           <a:solidFill>
-            <a:srgbClr val="F6F8FD"/>
+            <a:srgbClr val="F4F7FA"/>
           </a:solidFill>
           <a:ln w="9525">
             <a:solidFill>
-              <a:srgbClr val="DEE3F0"/>
+              <a:srgbClr val="D8E1EE"/>
             </a:solidFill>
           </a:ln>
           <a:effectLst/>
@@ -22048,11 +22048,11 @@
             </a:avLst>
           </a:prstGeom>
           <a:solidFill>
-            <a:srgbClr val="EAF0FF"/>
+            <a:srgbClr val="E6F4EE"/>
           </a:solidFill>
           <a:ln w="9525">
             <a:solidFill>
-              <a:srgbClr val="C9D7FF"/>
+              <a:srgbClr val="C3E6D8"/>
             </a:solidFill>
           </a:ln>
           <a:effectLst/>
@@ -22095,7 +22095,7 @@
             <a:r>
               <a:rPr sz="1875" b="1">
                 <a:solidFill>
-                  <a:srgbClr val="1E2A6E"/>
+                  <a:srgbClr val="1E3E69"/>
                 </a:solidFill>
                 <a:latin typeface="Pretendard"/>
                 <a:ea typeface="Pretendard"/>
@@ -22123,11 +22123,11 @@
             </a:avLst>
           </a:prstGeom>
           <a:solidFill>
-            <a:srgbClr val="F6F8FD"/>
+            <a:srgbClr val="F4F7FA"/>
           </a:solidFill>
           <a:ln w="9525">
             <a:solidFill>
-              <a:srgbClr val="DEE3F0"/>
+              <a:srgbClr val="D8E1EE"/>
             </a:solidFill>
           </a:ln>
           <a:effectLst/>
@@ -22198,11 +22198,11 @@
             </a:avLst>
           </a:prstGeom>
           <a:solidFill>
-            <a:srgbClr val="EAF0FF"/>
+            <a:srgbClr val="E6F4EE"/>
           </a:solidFill>
           <a:ln w="9525">
             <a:solidFill>
-              <a:srgbClr val="C9D7FF"/>
+              <a:srgbClr val="C3E6D8"/>
             </a:solidFill>
           </a:ln>
           <a:effectLst/>
@@ -22245,7 +22245,7 @@
             <a:r>
               <a:rPr sz="1875" b="1">
                 <a:solidFill>
-                  <a:srgbClr val="1E2A6E"/>
+                  <a:srgbClr val="1E3E69"/>
                 </a:solidFill>
                 <a:latin typeface="Pretendard"/>
                 <a:ea typeface="Pretendard"/>
@@ -22273,11 +22273,11 @@
             </a:avLst>
           </a:prstGeom>
           <a:solidFill>
-            <a:srgbClr val="F6F8FD"/>
+            <a:srgbClr val="F4F7FA"/>
           </a:solidFill>
           <a:ln w="9525">
             <a:solidFill>
-              <a:srgbClr val="DEE3F0"/>
+              <a:srgbClr val="D8E1EE"/>
             </a:solidFill>
           </a:ln>
           <a:effectLst/>
@@ -22348,11 +22348,11 @@
             </a:avLst>
           </a:prstGeom>
           <a:solidFill>
-            <a:srgbClr val="EAF0FF"/>
+            <a:srgbClr val="E6F4EE"/>
           </a:solidFill>
           <a:ln w="9525">
             <a:solidFill>
-              <a:srgbClr val="C9D7FF"/>
+              <a:srgbClr val="C3E6D8"/>
             </a:solidFill>
           </a:ln>
           <a:effectLst/>
@@ -22395,7 +22395,7 @@
             <a:r>
               <a:rPr sz="1875" b="1">
                 <a:solidFill>
-                  <a:srgbClr val="1E2A6E"/>
+                  <a:srgbClr val="1E3E69"/>
                 </a:solidFill>
                 <a:latin typeface="Pretendard"/>
                 <a:ea typeface="Pretendard"/>
@@ -22423,11 +22423,11 @@
             </a:avLst>
           </a:prstGeom>
           <a:solidFill>
-            <a:srgbClr val="F6F8FD"/>
+            <a:srgbClr val="F4F7FA"/>
           </a:solidFill>
           <a:ln w="9525">
             <a:solidFill>
-              <a:srgbClr val="DEE3F0"/>
+              <a:srgbClr val="D8E1EE"/>
             </a:solidFill>
           </a:ln>
           <a:effectLst/>
@@ -22537,7 +22537,7 @@
             <a:avLst/>
           </a:prstGeom>
           <a:solidFill>
-            <a:srgbClr val="DEE3F0"/>
+            <a:srgbClr val="D8E1EE"/>
           </a:solidFill>
           <a:ln>
             <a:noFill/>
@@ -22667,7 +22667,7 @@
             <a:avLst/>
           </a:prstGeom>
           <a:solidFill>
-            <a:srgbClr val="F4F6FC"/>
+            <a:srgbClr val="F3F8F6"/>
           </a:solidFill>
           <a:ln>
             <a:noFill/>
@@ -22697,7 +22697,7 @@
             <a:avLst/>
           </a:prstGeom>
           <a:solidFill>
-            <a:srgbClr val="F6F6F9"/>
+            <a:srgbClr val="F6F7F9"/>
           </a:solidFill>
           <a:ln>
             <a:noFill/>
@@ -22727,7 +22727,7 @@
             <a:avLst/>
           </a:prstGeom>
           <a:solidFill>
-            <a:srgbClr val="1E2A6E"/>
+            <a:srgbClr val="1E3E69"/>
           </a:solidFill>
           <a:ln>
             <a:noFill/>
@@ -22772,7 +22772,7 @@
             <a:r>
               <a:rPr sz="2400" b="1">
                 <a:solidFill>
-                  <a:srgbClr val="2457D6"/>
+                  <a:srgbClr val="1E7F5B"/>
                 </a:solidFill>
                 <a:latin typeface="Pretendard"/>
                 <a:ea typeface="Pretendard"/>
@@ -22813,7 +22813,7 @@
             <a:r>
               <a:rPr sz="6600" b="1">
                 <a:solidFill>
-                  <a:srgbClr val="1E2A6E"/>
+                  <a:srgbClr val="1E3E69"/>
                 </a:solidFill>
                 <a:latin typeface="Pretendard"/>
                 <a:ea typeface="Pretendard"/>
@@ -22880,7 +22880,7 @@
             <a:avLst/>
           </a:prstGeom>
           <a:solidFill>
-            <a:srgbClr val="DEE3F0"/>
+            <a:srgbClr val="D8E1EE"/>
           </a:solidFill>
           <a:ln>
             <a:noFill/>
@@ -23010,7 +23010,7 @@
             <a:avLst/>
           </a:prstGeom>
           <a:solidFill>
-            <a:srgbClr val="F4F6FC"/>
+            <a:srgbClr val="F3F8F6"/>
           </a:solidFill>
           <a:ln>
             <a:noFill/>
@@ -23070,7 +23070,7 @@
             <a:avLst/>
           </a:prstGeom>
           <a:solidFill>
-            <a:srgbClr val="F8F8FA"/>
+            <a:srgbClr val="F8F9FA"/>
           </a:solidFill>
           <a:ln>
             <a:noFill/>
@@ -23115,7 +23115,7 @@
             <a:r>
               <a:rPr sz="1950" b="1" spc="160">
                 <a:solidFill>
-                  <a:srgbClr val="2457D6"/>
+                  <a:srgbClr val="1E7F5B"/>
                 </a:solidFill>
                 <a:latin typeface="Pretendard"/>
                 <a:ea typeface="Pretendard"/>
@@ -23156,7 +23156,7 @@
             <a:r>
               <a:rPr sz="5100" b="1">
                 <a:solidFill>
-                  <a:srgbClr val="1E2A6E"/>
+                  <a:srgbClr val="1E3E69"/>
                 </a:solidFill>
                 <a:latin typeface="Pretendard"/>
                 <a:ea typeface="Pretendard"/>
@@ -23182,7 +23182,7 @@
             <a:avLst/>
           </a:prstGeom>
           <a:solidFill>
-            <a:srgbClr val="1E2A6E"/>
+            <a:srgbClr val="1E3E69"/>
           </a:solidFill>
           <a:ln>
             <a:noFill/>
@@ -23214,11 +23214,11 @@
             </a:avLst>
           </a:prstGeom>
           <a:solidFill>
-            <a:srgbClr val="F6F8FD"/>
+            <a:srgbClr val="F4F7FA"/>
           </a:solidFill>
           <a:ln w="9525">
             <a:solidFill>
-              <a:srgbClr val="DEE3F0"/>
+              <a:srgbClr val="D8E1EE"/>
             </a:solidFill>
           </a:ln>
           <a:effectLst/>
@@ -23246,7 +23246,7 @@
             <a:avLst/>
           </a:prstGeom>
           <a:solidFill>
-            <a:srgbClr val="2457D6"/>
+            <a:srgbClr val="1E7F5B"/>
           </a:solidFill>
           <a:ln>
             <a:noFill/>
@@ -23332,7 +23332,7 @@
             <a:r>
               <a:rPr sz="2700" b="1">
                 <a:solidFill>
-                  <a:srgbClr val="1E2A6E"/>
+                  <a:srgbClr val="1E3E69"/>
                 </a:solidFill>
                 <a:latin typeface="Pretendard"/>
                 <a:ea typeface="Pretendard"/>
@@ -23399,11 +23399,11 @@
             </a:avLst>
           </a:prstGeom>
           <a:solidFill>
-            <a:srgbClr val="F6F8FD"/>
+            <a:srgbClr val="F4F7FA"/>
           </a:solidFill>
           <a:ln w="9525">
             <a:solidFill>
-              <a:srgbClr val="DEE3F0"/>
+              <a:srgbClr val="D8E1EE"/>
             </a:solidFill>
           </a:ln>
           <a:effectLst/>
@@ -23431,7 +23431,7 @@
             <a:avLst/>
           </a:prstGeom>
           <a:solidFill>
-            <a:srgbClr val="2457D6"/>
+            <a:srgbClr val="1E7F5B"/>
           </a:solidFill>
           <a:ln>
             <a:noFill/>
@@ -23517,7 +23517,7 @@
             <a:r>
               <a:rPr sz="2700" b="1">
                 <a:solidFill>
-                  <a:srgbClr val="1E2A6E"/>
+                  <a:srgbClr val="1E3E69"/>
                 </a:solidFill>
                 <a:latin typeface="Pretendard"/>
                 <a:ea typeface="Pretendard"/>
@@ -23584,11 +23584,11 @@
             </a:avLst>
           </a:prstGeom>
           <a:solidFill>
-            <a:srgbClr val="F6F8FD"/>
+            <a:srgbClr val="F4F7FA"/>
           </a:solidFill>
           <a:ln w="9525">
             <a:solidFill>
-              <a:srgbClr val="DEE3F0"/>
+              <a:srgbClr val="D8E1EE"/>
             </a:solidFill>
           </a:ln>
           <a:effectLst/>
@@ -23616,7 +23616,7 @@
             <a:avLst/>
           </a:prstGeom>
           <a:solidFill>
-            <a:srgbClr val="2457D6"/>
+            <a:srgbClr val="1E7F5B"/>
           </a:solidFill>
           <a:ln>
             <a:noFill/>
@@ -23702,7 +23702,7 @@
             <a:r>
               <a:rPr sz="2700" b="1">
                 <a:solidFill>
-                  <a:srgbClr val="1E2A6E"/>
+                  <a:srgbClr val="1E3E69"/>
                 </a:solidFill>
                 <a:latin typeface="Pretendard"/>
                 <a:ea typeface="Pretendard"/>
@@ -23769,11 +23769,11 @@
             </a:avLst>
           </a:prstGeom>
           <a:solidFill>
-            <a:srgbClr val="F6F8FD"/>
+            <a:srgbClr val="F4F7FA"/>
           </a:solidFill>
           <a:ln w="9525">
             <a:solidFill>
-              <a:srgbClr val="DEE3F0"/>
+              <a:srgbClr val="D8E1EE"/>
             </a:solidFill>
           </a:ln>
           <a:effectLst/>
@@ -23801,7 +23801,7 @@
             <a:avLst/>
           </a:prstGeom>
           <a:solidFill>
-            <a:srgbClr val="2457D6"/>
+            <a:srgbClr val="1E7F5B"/>
           </a:solidFill>
           <a:ln>
             <a:noFill/>
@@ -23887,7 +23887,7 @@
             <a:r>
               <a:rPr sz="2700" b="1">
                 <a:solidFill>
-                  <a:srgbClr val="1E2A6E"/>
+                  <a:srgbClr val="1E3E69"/>
                 </a:solidFill>
                 <a:latin typeface="Pretendard"/>
                 <a:ea typeface="Pretendard"/>
@@ -23952,7 +23952,7 @@
             <a:avLst/>
           </a:prstGeom>
           <a:solidFill>
-            <a:srgbClr val="DEE3F0"/>
+            <a:srgbClr val="D8E1EE"/>
           </a:solidFill>
           <a:ln>
             <a:noFill/>
